--- a/project_01/docs/Yellen_EDES301_project_01_proposal.pptx
+++ b/project_01/docs/Yellen_EDES301_project_01_proposal.pptx
@@ -1650,7 +1650,7 @@
       </p:grpSpPr>
       <p:sp>
         <p:nvSpPr>
-          <p:cNvPr id="401" name="Google Shape;401;p3:notes"/>
+          <p:cNvPr id="401" name="Google Shape;401;h4bebc35e11a994aa_0_0:notes"/>
           <p:cNvSpPr txBox="1"/>
           <p:nvPr>
             <p:ph idx="1" type="body"/>
@@ -1689,7 +1689,7 @@
       </p:sp>
       <p:sp>
         <p:nvSpPr>
-          <p:cNvPr id="402" name="Google Shape;402;p3:notes"/>
+          <p:cNvPr id="402" name="Google Shape;402;h4bebc35e11a994aa_0_0:notes"/>
           <p:cNvSpPr/>
           <p:nvPr>
             <p:ph idx="2" type="sldImg"/>
@@ -1735,7 +1735,7 @@
   <p:cSld>
     <p:spTree>
       <p:nvGrpSpPr>
-        <p:cNvPr id="418" name="Shape 418"/>
+        <p:cNvPr id="407" name="Shape 407"/>
         <p:cNvGrpSpPr/>
         <p:nvPr/>
       </p:nvGrpSpPr>
@@ -1749,7 +1749,7 @@
       </p:grpSpPr>
       <p:sp>
         <p:nvSpPr>
-          <p:cNvPr id="419" name="Google Shape;419;p4:notes"/>
+          <p:cNvPr id="408" name="Google Shape;408;p3:notes"/>
           <p:cNvSpPr txBox="1"/>
           <p:nvPr>
             <p:ph idx="1" type="body"/>
@@ -1788,7 +1788,7 @@
       </p:sp>
       <p:sp>
         <p:nvSpPr>
-          <p:cNvPr id="420" name="Google Shape;420;p4:notes"/>
+          <p:cNvPr id="409" name="Google Shape;409;p3:notes"/>
           <p:cNvSpPr/>
           <p:nvPr>
             <p:ph idx="2" type="sldImg"/>
@@ -1834,7 +1834,7 @@
   <p:cSld>
     <p:spTree>
       <p:nvGrpSpPr>
-        <p:cNvPr id="433" name="Shape 433"/>
+        <p:cNvPr id="431" name="Shape 431"/>
         <p:cNvGrpSpPr/>
         <p:nvPr/>
       </p:nvGrpSpPr>
@@ -1848,7 +1848,7 @@
       </p:grpSpPr>
       <p:sp>
         <p:nvSpPr>
-          <p:cNvPr id="434" name="Google Shape;434;p5:notes"/>
+          <p:cNvPr id="432" name="Google Shape;432;p4:notes"/>
           <p:cNvSpPr txBox="1"/>
           <p:nvPr>
             <p:ph idx="1" type="body"/>
@@ -1887,7 +1887,7 @@
       </p:sp>
       <p:sp>
         <p:nvSpPr>
-          <p:cNvPr id="435" name="Google Shape;435;p5:notes"/>
+          <p:cNvPr id="433" name="Google Shape;433;p4:notes"/>
           <p:cNvSpPr/>
           <p:nvPr>
             <p:ph idx="2" type="sldImg"/>
@@ -1933,7 +1933,7 @@
   <p:cSld>
     <p:spTree>
       <p:nvGrpSpPr>
-        <p:cNvPr id="440" name="Shape 440"/>
+        <p:cNvPr id="443" name="Shape 443"/>
         <p:cNvGrpSpPr/>
         <p:nvPr/>
       </p:nvGrpSpPr>
@@ -1947,7 +1947,7 @@
       </p:grpSpPr>
       <p:sp>
         <p:nvSpPr>
-          <p:cNvPr id="441" name="Google Shape;441;p6:notes"/>
+          <p:cNvPr id="444" name="Google Shape;444;p5:notes"/>
           <p:cNvSpPr txBox="1"/>
           <p:nvPr>
             <p:ph idx="1" type="body"/>
@@ -1986,7 +1986,7 @@
       </p:sp>
       <p:sp>
         <p:nvSpPr>
-          <p:cNvPr id="442" name="Google Shape;442;p6:notes"/>
+          <p:cNvPr id="445" name="Google Shape;445;p5:notes"/>
           <p:cNvSpPr/>
           <p:nvPr>
             <p:ph idx="2" type="sldImg"/>
@@ -19370,11 +19370,7 @@
             </a:br>
             <a:r>
               <a:rPr lang="en-US" sz="6000"/>
-              <a:t>Morse Code Display</a:t>
-            </a:r>
-            <a:r>
-              <a:rPr lang="en-US" sz="6000"/>
-              <a:t> </a:t>
+              <a:t>Morse Code Trainer </a:t>
             </a:r>
             <a:r>
               <a:rPr lang="en-US" sz="6000"/>
@@ -19587,7 +19583,40 @@
             </a:pPr>
             <a:r>
               <a:rPr lang="en-US"/>
-              <a:t>Overall, my project will be a way for people to learn and practice writing in Morse Code. The user will input a message in Morse Code with a button and it will be displayed on a screen. There will also be two other buttons: one as a backspace and the other to confirm the message at the end (both will also be used to move between screens in the beginning)</a:t>
+              <a:t>Overall, my project will be a way for people to learn and practice writing in Morse Code. It will </a:t>
+            </a:r>
+            <a:r>
+              <a:rPr lang="en-US"/>
+              <a:t>have</a:t>
+            </a:r>
+            <a:r>
+              <a:rPr lang="en-US"/>
+              <a:t> a training mode, teaching the user to write letters in Morse Code similar to </a:t>
+            </a:r>
+            <a:r>
+              <a:rPr lang="en-US" u="sng">
+                <a:solidFill>
+                  <a:schemeClr val="hlink"/>
+                </a:solidFill>
+                <a:hlinkClick r:id="rId3"/>
+              </a:rPr>
+              <a:t>Google’s Hello Morse</a:t>
+            </a:r>
+            <a:r>
+              <a:rPr lang="en-US"/>
+              <a:t>, and then </a:t>
+            </a:r>
+            <a:r>
+              <a:rPr lang="en-US"/>
+              <a:t>have</a:t>
+            </a:r>
+            <a:r>
+              <a:rPr lang="en-US"/>
+              <a:t> a display mode, where the user can enter messages.</a:t>
+            </a:r>
+            <a:r>
+              <a:rPr lang="en-US"/>
+              <a:t> </a:t>
             </a:r>
             <a:endParaRPr/>
           </a:p>
@@ -19622,7 +19651,7 @@
                 <a:solidFill>
                   <a:schemeClr val="hlink"/>
                 </a:solidFill>
-                <a:hlinkClick r:id="rId3"/>
+                <a:hlinkClick r:id="rId4"/>
               </a:rPr>
               <a:t>Morse Code Decoder</a:t>
             </a:r>
@@ -19635,7 +19664,7 @@
                 <a:solidFill>
                   <a:schemeClr val="hlink"/>
                 </a:solidFill>
-                <a:hlinkClick r:id="rId4"/>
+                <a:hlinkClick r:id="rId5"/>
               </a:rPr>
               <a:t>Morse Code </a:t>
             </a:r>
@@ -19644,7 +19673,7 @@
                 <a:solidFill>
                   <a:schemeClr val="hlink"/>
                 </a:solidFill>
-                <a:hlinkClick r:id="rId5"/>
+                <a:hlinkClick r:id="rId6"/>
               </a:rPr>
               <a:t>Transceiver</a:t>
             </a:r>
@@ -19764,6 +19793,255 @@
         <p:spPr>
           <a:xfrm>
             <a:off x="609600" y="228600"/>
+            <a:ext cx="10972800" cy="914400"/>
+          </a:xfrm>
+          <a:prstGeom prst="rect">
+            <a:avLst/>
+          </a:prstGeom>
+          <a:noFill/>
+          <a:ln>
+            <a:noFill/>
+          </a:ln>
+        </p:spPr>
+        <p:txBody>
+          <a:bodyPr anchorCtr="0" anchor="b" bIns="45700" lIns="91425" spcFirstLastPara="1" rIns="91425" wrap="square" tIns="45700">
+            <a:normAutofit/>
+          </a:bodyPr>
+          <a:lstStyle/>
+          <a:p>
+            <a:pPr indent="0" lvl="0" marL="0" rtl="0" algn="l">
+              <a:lnSpc>
+                <a:spcPct val="90000"/>
+              </a:lnSpc>
+              <a:spcBef>
+                <a:spcPts val="0"/>
+              </a:spcBef>
+              <a:spcAft>
+                <a:spcPts val="0"/>
+              </a:spcAft>
+              <a:buClr>
+                <a:srgbClr val="276E8B"/>
+              </a:buClr>
+              <a:buSzPts val="3200"/>
+              <a:buFont typeface="Arial"/>
+              <a:buNone/>
+            </a:pPr>
+            <a:r>
+              <a:rPr lang="en-US"/>
+              <a:t>Background Information - Continued</a:t>
+            </a:r>
+            <a:endParaRPr/>
+          </a:p>
+        </p:txBody>
+      </p:sp>
+      <p:sp>
+        <p:nvSpPr>
+          <p:cNvPr id="405" name="Google Shape;405;p15"/>
+          <p:cNvSpPr txBox="1"/>
+          <p:nvPr>
+            <p:ph idx="1" type="body"/>
+          </p:nvPr>
+        </p:nvSpPr>
+        <p:spPr>
+          <a:xfrm>
+            <a:off x="609600" y="1295400"/>
+            <a:ext cx="7541700" cy="4724400"/>
+          </a:xfrm>
+          <a:prstGeom prst="rect">
+            <a:avLst/>
+          </a:prstGeom>
+          <a:noFill/>
+          <a:ln>
+            <a:noFill/>
+          </a:ln>
+        </p:spPr>
+        <p:txBody>
+          <a:bodyPr anchorCtr="0" anchor="t" bIns="45700" lIns="91425" spcFirstLastPara="1" rIns="91425" wrap="square" tIns="45700">
+            <a:normAutofit lnSpcReduction="10000"/>
+          </a:bodyPr>
+          <a:lstStyle/>
+          <a:p>
+            <a:pPr indent="-342900" lvl="0" marL="457200" rtl="0" algn="l">
+              <a:lnSpc>
+                <a:spcPct val="115000"/>
+              </a:lnSpc>
+              <a:spcBef>
+                <a:spcPts val="1000"/>
+              </a:spcBef>
+              <a:spcAft>
+                <a:spcPts val="0"/>
+              </a:spcAft>
+              <a:buSzPts val="1800"/>
+              <a:buChar char="-"/>
+            </a:pPr>
+            <a:r>
+              <a:rPr lang="en-US"/>
+              <a:t>My project will have a few modes:</a:t>
+            </a:r>
+            <a:endParaRPr/>
+          </a:p>
+          <a:p>
+            <a:pPr indent="-342900" lvl="1" marL="914400" rtl="0" algn="l">
+              <a:lnSpc>
+                <a:spcPct val="115000"/>
+              </a:lnSpc>
+              <a:spcBef>
+                <a:spcPts val="0"/>
+              </a:spcBef>
+              <a:spcAft>
+                <a:spcPts val="0"/>
+              </a:spcAft>
+              <a:buSzPts val="1800"/>
+              <a:buChar char="-"/>
+            </a:pPr>
+            <a:r>
+              <a:rPr lang="en-US"/>
+              <a:t>Training: the corresponding image for a letter will appear, as shown in </a:t>
+            </a:r>
+            <a:r>
+              <a:rPr lang="en-US"/>
+              <a:t>the graphic on the right. The user will then have to enter the letter in morse code with the button input. Once they enter it correctly, it will move on to another letter</a:t>
+            </a:r>
+            <a:endParaRPr/>
+          </a:p>
+          <a:p>
+            <a:pPr indent="-342900" lvl="1" marL="914400" rtl="0" algn="l">
+              <a:lnSpc>
+                <a:spcPct val="115000"/>
+              </a:lnSpc>
+              <a:spcBef>
+                <a:spcPts val="0"/>
+              </a:spcBef>
+              <a:spcAft>
+                <a:spcPts val="0"/>
+              </a:spcAft>
+              <a:buSzPts val="1800"/>
+              <a:buChar char="-"/>
+            </a:pPr>
+            <a:r>
+              <a:rPr lang="en-US"/>
+              <a:t>Display: the user can write messages with morse code that will be shown on the display screen</a:t>
+            </a:r>
+            <a:endParaRPr/>
+          </a:p>
+          <a:p>
+            <a:pPr indent="-342900" lvl="1" marL="914400" rtl="0" algn="l">
+              <a:lnSpc>
+                <a:spcPct val="115000"/>
+              </a:lnSpc>
+              <a:spcBef>
+                <a:spcPts val="0"/>
+              </a:spcBef>
+              <a:spcAft>
+                <a:spcPts val="0"/>
+              </a:spcAft>
+              <a:buSzPts val="1800"/>
+              <a:buChar char="-"/>
+            </a:pPr>
+            <a:r>
+              <a:rPr lang="en-US"/>
+              <a:t>Game (possible): A letter will flash on the screen and the user has to type it in morse code. As they get more right, the time to enter the letter will reduce, making it harder. My focus is more on the first two modes, but this would be a nice extension. </a:t>
+            </a:r>
+            <a:endParaRPr/>
+          </a:p>
+          <a:p>
+            <a:pPr indent="-342900" lvl="0" marL="457200" rtl="0" algn="l">
+              <a:lnSpc>
+                <a:spcPct val="115000"/>
+              </a:lnSpc>
+              <a:spcBef>
+                <a:spcPts val="0"/>
+              </a:spcBef>
+              <a:spcAft>
+                <a:spcPts val="0"/>
+              </a:spcAft>
+              <a:buSzPts val="1800"/>
+              <a:buChar char="-"/>
+            </a:pPr>
+            <a:r>
+              <a:rPr lang="en-US"/>
+              <a:t>There will be one main button for morse code input, and a LED will light up as the button is pressed. There will be two other buttons to help with system navigation. There also may be a small piezobuzzer</a:t>
+            </a:r>
+            <a:endParaRPr/>
+          </a:p>
+        </p:txBody>
+      </p:sp>
+      <p:pic>
+        <p:nvPicPr>
+          <p:cNvPr descr="Hello Morse — Matthew Carey" id="406" name="Google Shape;406;p15"/>
+          <p:cNvPicPr preferRelativeResize="0"/>
+          <p:nvPr/>
+        </p:nvPicPr>
+        <p:blipFill>
+          <a:blip r:embed="rId3">
+            <a:alphaModFix/>
+          </a:blip>
+          <a:stretch>
+            <a:fillRect/>
+          </a:stretch>
+        </p:blipFill>
+        <p:spPr>
+          <a:xfrm>
+            <a:off x="8151300" y="288450"/>
+            <a:ext cx="3860790" cy="5791199"/>
+          </a:xfrm>
+          <a:prstGeom prst="rect">
+            <a:avLst/>
+          </a:prstGeom>
+          <a:noFill/>
+          <a:ln>
+            <a:noFill/>
+          </a:ln>
+        </p:spPr>
+      </p:pic>
+    </p:spTree>
+  </p:cSld>
+  <p:clrMapOvr>
+    <a:masterClrMapping/>
+  </p:clrMapOvr>
+  <mc:AlternateContent>
+    <mc:Choice Requires="p14">
+      <p:transition spd="slow" p14:dur="700">
+        <p:fade/>
+      </p:transition>
+    </mc:Choice>
+    <mc:Fallback>
+      <p:transition spd="slow">
+        <p:fade/>
+      </p:transition>
+    </mc:Fallback>
+  </mc:AlternateContent>
+</p:sld>
+</file>
+
+<file path=ppt/slides/slide4.xml><?xml version="1.0" encoding="utf-8"?>
+<p:sld xmlns:a="http://schemas.openxmlformats.org/drawingml/2006/main" xmlns:r="http://schemas.openxmlformats.org/officeDocument/2006/relationships" xmlns:mc="http://schemas.openxmlformats.org/markup-compatibility/2006" xmlns:mv="urn:schemas-microsoft-com:mac:vml" xmlns:p="http://schemas.openxmlformats.org/presentationml/2006/main" xmlns:c="http://schemas.openxmlformats.org/drawingml/2006/chart" xmlns:dgm="http://schemas.openxmlformats.org/drawingml/2006/diagram" xmlns:o="urn:schemas-microsoft-com:office:office" xmlns:v="urn:schemas-microsoft-com:vml" xmlns:pvml="urn:schemas-microsoft-com:office:powerpoint" xmlns:com="http://schemas.openxmlformats.org/drawingml/2006/compatibility" xmlns:p14="http://schemas.microsoft.com/office/powerpoint/2010/main" xmlns:p15="http://schemas.microsoft.com/office/powerpoint/2012/main" xmlns:ahyp="http://schemas.microsoft.com/office/drawing/2018/hyperlinkcolor">
+  <p:cSld>
+    <p:spTree>
+      <p:nvGrpSpPr>
+        <p:cNvPr id="410" name="Shape 410"/>
+        <p:cNvGrpSpPr/>
+        <p:nvPr/>
+      </p:nvGrpSpPr>
+      <p:grpSpPr>
+        <a:xfrm>
+          <a:off x="0" y="0"/>
+          <a:ext cx="0" cy="0"/>
+          <a:chOff x="0" y="0"/>
+          <a:chExt cx="0" cy="0"/>
+        </a:xfrm>
+      </p:grpSpPr>
+      <p:sp>
+        <p:nvSpPr>
+          <p:cNvPr id="411" name="Google Shape;411;p16"/>
+          <p:cNvSpPr txBox="1"/>
+          <p:nvPr>
+            <p:ph type="title"/>
+          </p:nvPr>
+        </p:nvSpPr>
+        <p:spPr>
+          <a:xfrm>
+            <a:off x="609600" y="228600"/>
             <a:ext cx="10972800" cy="914401"/>
           </a:xfrm>
           <a:prstGeom prst="rect">
@@ -19807,7 +20085,7 @@
       </p:sp>
       <p:sp>
         <p:nvSpPr>
-          <p:cNvPr id="405" name="Google Shape;405;p15"/>
+          <p:cNvPr id="412" name="Google Shape;412;p16"/>
           <p:cNvSpPr/>
           <p:nvPr/>
         </p:nvSpPr>
@@ -19859,13 +20137,13 @@
       </p:sp>
       <p:sp>
         <p:nvSpPr>
-          <p:cNvPr id="406" name="Google Shape;406;p15"/>
+          <p:cNvPr id="413" name="Google Shape;413;p16"/>
           <p:cNvSpPr/>
           <p:nvPr/>
         </p:nvSpPr>
         <p:spPr>
           <a:xfrm>
-            <a:off x="2226900" y="2369950"/>
+            <a:off x="2226900" y="1961025"/>
             <a:ext cx="1717500" cy="571500"/>
           </a:xfrm>
           <a:prstGeom prst="rect">
@@ -19925,7 +20203,7 @@
       </p:sp>
       <p:sp>
         <p:nvSpPr>
-          <p:cNvPr id="407" name="Google Shape;407;p15"/>
+          <p:cNvPr id="414" name="Google Shape;414;p16"/>
           <p:cNvSpPr/>
           <p:nvPr/>
         </p:nvSpPr>
@@ -19967,22 +20245,11 @@
             </a:pPr>
             <a:r>
               <a:rPr lang="en-US"/>
-              <a:t>Display Screen</a:t>
+              <a:t>Display </a:t>
             </a:r>
-            <a:endParaRPr/>
-          </a:p>
-          <a:p>
-            <a:pPr indent="0" lvl="0" marL="0" rtl="0" algn="l">
-              <a:spcBef>
-                <a:spcPts val="0"/>
-              </a:spcBef>
-              <a:spcAft>
-                <a:spcPts val="0"/>
-              </a:spcAft>
-              <a:buNone/>
-            </a:pPr>
             <a:r>
-              <a:t/>
+              <a:rPr lang="en-US"/>
+              <a:t>Screen</a:t>
             </a:r>
             <a:endParaRPr/>
           </a:p>
@@ -19997,8 +20264,7 @@
               <a:buNone/>
             </a:pPr>
             <a:r>
-              <a:rPr lang="en-US"/>
-              <a:t>pins RS, EN, D7, D6, D5, and D4</a:t>
+              <a:t/>
             </a:r>
             <a:endParaRPr/>
           </a:p>
@@ -20006,13 +20272,13 @@
       </p:sp>
       <p:sp>
         <p:nvSpPr>
-          <p:cNvPr id="408" name="Google Shape;408;p15"/>
+          <p:cNvPr id="415" name="Google Shape;415;p16"/>
           <p:cNvSpPr/>
           <p:nvPr/>
         </p:nvSpPr>
         <p:spPr>
           <a:xfrm>
-            <a:off x="2129400" y="3320625"/>
+            <a:off x="2129400" y="2724200"/>
             <a:ext cx="1912500" cy="571500"/>
           </a:xfrm>
           <a:prstGeom prst="rect">
@@ -20072,13 +20338,13 @@
       </p:sp>
       <p:sp>
         <p:nvSpPr>
-          <p:cNvPr id="409" name="Google Shape;409;p15"/>
+          <p:cNvPr id="416" name="Google Shape;416;p16"/>
           <p:cNvSpPr/>
           <p:nvPr/>
         </p:nvSpPr>
         <p:spPr>
           <a:xfrm>
-            <a:off x="2324400" y="4271300"/>
+            <a:off x="2190850" y="3487375"/>
             <a:ext cx="1717500" cy="571500"/>
           </a:xfrm>
           <a:prstGeom prst="rect">
@@ -20138,13 +20404,13 @@
       </p:sp>
       <p:sp>
         <p:nvSpPr>
-          <p:cNvPr id="410" name="Google Shape;410;p15"/>
+          <p:cNvPr id="417" name="Google Shape;417;p16"/>
           <p:cNvSpPr txBox="1"/>
           <p:nvPr/>
         </p:nvSpPr>
         <p:spPr>
           <a:xfrm>
-            <a:off x="4628100" y="2532525"/>
+            <a:off x="4628100" y="2105813"/>
             <a:ext cx="717000" cy="358500"/>
           </a:xfrm>
           <a:prstGeom prst="rect">
@@ -20176,7 +20442,7 @@
                   <a:schemeClr val="dk1"/>
                 </a:solidFill>
               </a:rPr>
-              <a:t>P2_02</a:t>
+              <a:t>P2_30</a:t>
             </a:r>
             <a:endParaRPr sz="1200">
               <a:solidFill>
@@ -20188,13 +20454,13 @@
       </p:sp>
       <p:sp>
         <p:nvSpPr>
-          <p:cNvPr id="411" name="Google Shape;411;p15"/>
+          <p:cNvPr id="418" name="Google Shape;418;p16"/>
           <p:cNvSpPr txBox="1"/>
           <p:nvPr/>
         </p:nvSpPr>
         <p:spPr>
           <a:xfrm>
-            <a:off x="4628100" y="3427125"/>
+            <a:off x="4583350" y="2724200"/>
             <a:ext cx="717000" cy="358500"/>
           </a:xfrm>
           <a:prstGeom prst="rect">
@@ -20226,7 +20492,7 @@
                   <a:schemeClr val="dk1"/>
                 </a:solidFill>
               </a:rPr>
-              <a:t>P2_04</a:t>
+              <a:t>P2_32</a:t>
             </a:r>
             <a:endParaRPr sz="1200">
               <a:solidFill>
@@ -20238,13 +20504,13 @@
       </p:sp>
       <p:sp>
         <p:nvSpPr>
-          <p:cNvPr id="412" name="Google Shape;412;p15"/>
+          <p:cNvPr id="419" name="Google Shape;419;p16"/>
           <p:cNvSpPr txBox="1"/>
           <p:nvPr/>
         </p:nvSpPr>
         <p:spPr>
           <a:xfrm>
-            <a:off x="4583275" y="4280550"/>
+            <a:off x="4628100" y="3342575"/>
             <a:ext cx="717000" cy="358500"/>
           </a:xfrm>
           <a:prstGeom prst="rect">
@@ -20276,277 +20542,7 @@
                   <a:schemeClr val="dk1"/>
                 </a:solidFill>
               </a:rPr>
-              <a:t>P2_06</a:t>
-            </a:r>
-            <a:endParaRPr sz="1200">
-              <a:solidFill>
-                <a:schemeClr val="dk1"/>
-              </a:solidFill>
-            </a:endParaRPr>
-          </a:p>
-        </p:txBody>
-      </p:sp>
-      <p:sp>
-        <p:nvSpPr>
-          <p:cNvPr id="413" name="Google Shape;413;p15"/>
-          <p:cNvSpPr txBox="1"/>
-          <p:nvPr/>
-        </p:nvSpPr>
-        <p:spPr>
-          <a:xfrm>
-            <a:off x="6831175" y="2532525"/>
-            <a:ext cx="717000" cy="2207400"/>
-          </a:xfrm>
-          <a:prstGeom prst="rect">
-            <a:avLst/>
-          </a:prstGeom>
-          <a:noFill/>
-          <a:ln>
-            <a:noFill/>
-          </a:ln>
-        </p:spPr>
-        <p:txBody>
-          <a:bodyPr anchorCtr="0" anchor="t" bIns="91425" lIns="91425" spcFirstLastPara="1" rIns="91425" wrap="square" tIns="91425">
-            <a:noAutofit/>
-          </a:bodyPr>
-          <a:lstStyle/>
-          <a:p>
-            <a:pPr indent="0" lvl="0" marL="0" rtl="0" algn="l">
-              <a:spcBef>
-                <a:spcPts val="0"/>
-              </a:spcBef>
-              <a:spcAft>
-                <a:spcPts val="0"/>
-              </a:spcAft>
-              <a:buNone/>
-            </a:pPr>
-            <a:r>
-              <a:rPr lang="en-US" sz="1200">
-                <a:solidFill>
-                  <a:schemeClr val="dk1"/>
-                </a:solidFill>
-              </a:rPr>
-              <a:t>P2_08</a:t>
-            </a:r>
-            <a:endParaRPr sz="1200">
-              <a:solidFill>
-                <a:schemeClr val="dk1"/>
-              </a:solidFill>
-            </a:endParaRPr>
-          </a:p>
-          <a:p>
-            <a:pPr indent="0" lvl="0" marL="0" rtl="0" algn="l">
-              <a:spcBef>
-                <a:spcPts val="0"/>
-              </a:spcBef>
-              <a:spcAft>
-                <a:spcPts val="0"/>
-              </a:spcAft>
-              <a:buNone/>
-            </a:pPr>
-            <a:r>
-              <a:t/>
-            </a:r>
-            <a:endParaRPr sz="1200">
-              <a:solidFill>
-                <a:schemeClr val="dk1"/>
-              </a:solidFill>
-            </a:endParaRPr>
-          </a:p>
-          <a:p>
-            <a:pPr indent="0" lvl="0" marL="0" rtl="0" algn="l">
-              <a:spcBef>
-                <a:spcPts val="0"/>
-              </a:spcBef>
-              <a:spcAft>
-                <a:spcPts val="0"/>
-              </a:spcAft>
-              <a:buNone/>
-            </a:pPr>
-            <a:r>
-              <a:rPr lang="en-US" sz="1200">
-                <a:solidFill>
-                  <a:schemeClr val="dk1"/>
-                </a:solidFill>
-              </a:rPr>
-              <a:t>P2_10</a:t>
-            </a:r>
-            <a:endParaRPr sz="1200">
-              <a:solidFill>
-                <a:schemeClr val="dk1"/>
-              </a:solidFill>
-            </a:endParaRPr>
-          </a:p>
-          <a:p>
-            <a:pPr indent="0" lvl="0" marL="0" rtl="0" algn="l">
-              <a:spcBef>
-                <a:spcPts val="0"/>
-              </a:spcBef>
-              <a:spcAft>
-                <a:spcPts val="0"/>
-              </a:spcAft>
-              <a:buNone/>
-            </a:pPr>
-            <a:r>
-              <a:t/>
-            </a:r>
-            <a:endParaRPr sz="1200">
-              <a:solidFill>
-                <a:schemeClr val="dk1"/>
-              </a:solidFill>
-            </a:endParaRPr>
-          </a:p>
-          <a:p>
-            <a:pPr indent="0" lvl="0" marL="0" rtl="0" algn="l">
-              <a:spcBef>
-                <a:spcPts val="0"/>
-              </a:spcBef>
-              <a:spcAft>
-                <a:spcPts val="0"/>
-              </a:spcAft>
-              <a:buNone/>
-            </a:pPr>
-            <a:r>
-              <a:rPr lang="en-US" sz="1200">
-                <a:solidFill>
-                  <a:schemeClr val="dk1"/>
-                </a:solidFill>
-              </a:rPr>
-              <a:t>P2_18</a:t>
-            </a:r>
-            <a:endParaRPr sz="1200">
-              <a:solidFill>
-                <a:schemeClr val="dk1"/>
-              </a:solidFill>
-            </a:endParaRPr>
-          </a:p>
-          <a:p>
-            <a:pPr indent="0" lvl="0" marL="0" rtl="0" algn="l">
-              <a:spcBef>
-                <a:spcPts val="0"/>
-              </a:spcBef>
-              <a:spcAft>
-                <a:spcPts val="0"/>
-              </a:spcAft>
-              <a:buNone/>
-            </a:pPr>
-            <a:r>
-              <a:t/>
-            </a:r>
-            <a:endParaRPr sz="1200">
-              <a:solidFill>
-                <a:schemeClr val="dk1"/>
-              </a:solidFill>
-            </a:endParaRPr>
-          </a:p>
-          <a:p>
-            <a:pPr indent="0" lvl="0" marL="0" rtl="0" algn="l">
-              <a:spcBef>
-                <a:spcPts val="0"/>
-              </a:spcBef>
-              <a:spcAft>
-                <a:spcPts val="0"/>
-              </a:spcAft>
-              <a:buNone/>
-            </a:pPr>
-            <a:r>
-              <a:rPr lang="en-US" sz="1200">
-                <a:solidFill>
-                  <a:schemeClr val="dk1"/>
-                </a:solidFill>
-              </a:rPr>
-              <a:t>P2_20</a:t>
-            </a:r>
-            <a:endParaRPr sz="1200">
-              <a:solidFill>
-                <a:schemeClr val="dk1"/>
-              </a:solidFill>
-            </a:endParaRPr>
-          </a:p>
-          <a:p>
-            <a:pPr indent="0" lvl="0" marL="0" rtl="0" algn="l">
-              <a:spcBef>
-                <a:spcPts val="0"/>
-              </a:spcBef>
-              <a:spcAft>
-                <a:spcPts val="0"/>
-              </a:spcAft>
-              <a:buNone/>
-            </a:pPr>
-            <a:r>
-              <a:t/>
-            </a:r>
-            <a:endParaRPr sz="1200">
-              <a:solidFill>
-                <a:schemeClr val="dk1"/>
-              </a:solidFill>
-            </a:endParaRPr>
-          </a:p>
-          <a:p>
-            <a:pPr indent="0" lvl="0" marL="0" rtl="0" algn="l">
-              <a:spcBef>
-                <a:spcPts val="0"/>
-              </a:spcBef>
-              <a:spcAft>
-                <a:spcPts val="0"/>
-              </a:spcAft>
-              <a:buNone/>
-            </a:pPr>
-            <a:r>
-              <a:rPr lang="en-US" sz="1200">
-                <a:solidFill>
-                  <a:schemeClr val="dk1"/>
-                </a:solidFill>
-              </a:rPr>
-              <a:t>P2_22</a:t>
-            </a:r>
-            <a:endParaRPr sz="1200">
-              <a:solidFill>
-                <a:schemeClr val="dk1"/>
-              </a:solidFill>
-            </a:endParaRPr>
-          </a:p>
-          <a:p>
-            <a:pPr indent="0" lvl="0" marL="0" rtl="0" algn="l">
-              <a:spcBef>
-                <a:spcPts val="0"/>
-              </a:spcBef>
-              <a:spcAft>
-                <a:spcPts val="0"/>
-              </a:spcAft>
-              <a:buNone/>
-            </a:pPr>
-            <a:r>
-              <a:t/>
-            </a:r>
-            <a:endParaRPr sz="1200">
-              <a:solidFill>
-                <a:schemeClr val="dk1"/>
-              </a:solidFill>
-            </a:endParaRPr>
-          </a:p>
-          <a:p>
-            <a:pPr indent="0" lvl="0" marL="0" rtl="0" algn="l">
-              <a:spcBef>
-                <a:spcPts val="0"/>
-              </a:spcBef>
-              <a:spcAft>
-                <a:spcPts val="0"/>
-              </a:spcAft>
-              <a:buClr>
-                <a:schemeClr val="dk1"/>
-              </a:buClr>
-              <a:buSzPts val="1100"/>
-              <a:buFont typeface="Arial"/>
-              <a:buNone/>
-            </a:pPr>
-            <a:r>
-              <a:rPr lang="en-US" sz="1200">
-                <a:solidFill>
-                  <a:schemeClr val="dk1"/>
-                </a:solidFill>
-              </a:rPr>
-              <a:t>P2_24</a:t>
+              <a:t>P2_34</a:t>
             </a:r>
             <a:endParaRPr sz="1200">
               <a:solidFill>
@@ -20558,17 +20554,17 @@
       </p:sp>
       <p:cxnSp>
         <p:nvCxnSpPr>
-          <p:cNvPr id="414" name="Google Shape;414;p15"/>
+          <p:cNvPr id="420" name="Google Shape;420;p16"/>
           <p:cNvCxnSpPr>
-            <a:stCxn id="406" idx="3"/>
-            <a:endCxn id="410" idx="1"/>
+            <a:stCxn id="413" idx="3"/>
+            <a:endCxn id="417" idx="1"/>
           </p:cNvCxnSpPr>
           <p:nvPr/>
         </p:nvCxnSpPr>
         <p:spPr>
           <a:xfrm>
-            <a:off x="3944400" y="2655700"/>
-            <a:ext cx="683700" cy="56100"/>
+            <a:off x="3944400" y="2246775"/>
+            <a:ext cx="683700" cy="38400"/>
           </a:xfrm>
           <a:prstGeom prst="straightConnector1">
             <a:avLst/>
@@ -20587,17 +20583,17 @@
       </p:cxnSp>
       <p:cxnSp>
         <p:nvCxnSpPr>
-          <p:cNvPr id="415" name="Google Shape;415;p15"/>
+          <p:cNvPr id="421" name="Google Shape;421;p16"/>
           <p:cNvCxnSpPr>
-            <a:stCxn id="408" idx="3"/>
-            <a:endCxn id="411" idx="1"/>
+            <a:stCxn id="415" idx="3"/>
+            <a:endCxn id="418" idx="1"/>
           </p:cNvCxnSpPr>
           <p:nvPr/>
         </p:nvCxnSpPr>
         <p:spPr>
-          <a:xfrm>
-            <a:off x="4041900" y="3606375"/>
-            <a:ext cx="586200" cy="0"/>
+          <a:xfrm flipH="1" rot="10800000">
+            <a:off x="4041900" y="2903450"/>
+            <a:ext cx="541500" cy="106500"/>
           </a:xfrm>
           <a:prstGeom prst="straightConnector1">
             <a:avLst/>
@@ -20616,17 +20612,17 @@
       </p:cxnSp>
       <p:cxnSp>
         <p:nvCxnSpPr>
-          <p:cNvPr id="416" name="Google Shape;416;p15"/>
+          <p:cNvPr id="422" name="Google Shape;422;p16"/>
           <p:cNvCxnSpPr>
-            <a:stCxn id="409" idx="3"/>
-            <a:endCxn id="412" idx="1"/>
+            <a:stCxn id="416" idx="3"/>
+            <a:endCxn id="419" idx="1"/>
           </p:cNvCxnSpPr>
           <p:nvPr/>
         </p:nvCxnSpPr>
         <p:spPr>
           <a:xfrm flipH="1" rot="10800000">
-            <a:off x="4041900" y="4459850"/>
-            <a:ext cx="541500" cy="97200"/>
+            <a:off x="3908350" y="3521725"/>
+            <a:ext cx="719700" cy="251400"/>
           </a:xfrm>
           <a:prstGeom prst="straightConnector1">
             <a:avLst/>
@@ -20645,17 +20641,274 @@
       </p:cxnSp>
       <p:cxnSp>
         <p:nvCxnSpPr>
-          <p:cNvPr id="417" name="Google Shape;417;p15"/>
+          <p:cNvPr id="423" name="Google Shape;423;p16"/>
           <p:cNvCxnSpPr>
-            <a:stCxn id="413" idx="3"/>
-            <a:endCxn id="407" idx="1"/>
+            <a:stCxn id="424" idx="3"/>
+            <a:endCxn id="414" idx="1"/>
           </p:cNvCxnSpPr>
           <p:nvPr/>
         </p:nvCxnSpPr>
         <p:spPr>
           <a:xfrm flipH="1" rot="10800000">
-            <a:off x="7548175" y="3543225"/>
+            <a:off x="7548250" y="3543275"/>
             <a:ext cx="814200" cy="93000"/>
+          </a:xfrm>
+          <a:prstGeom prst="straightConnector1">
+            <a:avLst/>
+          </a:prstGeom>
+          <a:noFill/>
+          <a:ln cap="flat" cmpd="sng" w="9525">
+            <a:solidFill>
+              <a:schemeClr val="dk2"/>
+            </a:solidFill>
+            <a:prstDash val="solid"/>
+            <a:round/>
+            <a:headEnd len="med" w="med" type="none"/>
+            <a:tailEnd len="med" w="med" type="none"/>
+          </a:ln>
+        </p:spPr>
+      </p:cxnSp>
+      <p:sp>
+        <p:nvSpPr>
+          <p:cNvPr id="425" name="Google Shape;425;p16"/>
+          <p:cNvSpPr/>
+          <p:nvPr/>
+        </p:nvSpPr>
+        <p:spPr>
+          <a:xfrm>
+            <a:off x="2661275" y="4307238"/>
+            <a:ext cx="1043700" cy="321300"/>
+          </a:xfrm>
+          <a:prstGeom prst="rect">
+            <a:avLst/>
+          </a:prstGeom>
+          <a:solidFill>
+            <a:schemeClr val="accent1"/>
+          </a:solidFill>
+          <a:ln cap="flat" cmpd="sng" w="9525">
+            <a:solidFill>
+              <a:schemeClr val="dk2"/>
+            </a:solidFill>
+            <a:prstDash val="solid"/>
+            <a:round/>
+            <a:headEnd len="sm" w="sm" type="none"/>
+            <a:tailEnd len="sm" w="sm" type="none"/>
+          </a:ln>
+        </p:spPr>
+        <p:txBody>
+          <a:bodyPr anchorCtr="0" anchor="ctr" bIns="91425" lIns="91425" spcFirstLastPara="1" rIns="91425" wrap="square" tIns="91425">
+            <a:noAutofit/>
+          </a:bodyPr>
+          <a:lstStyle/>
+          <a:p>
+            <a:pPr indent="0" lvl="0" marL="0" rtl="0" algn="ctr">
+              <a:spcBef>
+                <a:spcPts val="0"/>
+              </a:spcBef>
+              <a:spcAft>
+                <a:spcPts val="0"/>
+              </a:spcAft>
+              <a:buNone/>
+            </a:pPr>
+            <a:r>
+              <a:rPr lang="en-US"/>
+              <a:t>LED</a:t>
+            </a:r>
+            <a:endParaRPr/>
+          </a:p>
+        </p:txBody>
+      </p:sp>
+      <p:sp>
+        <p:nvSpPr>
+          <p:cNvPr id="426" name="Google Shape;426;p16"/>
+          <p:cNvSpPr/>
+          <p:nvPr/>
+        </p:nvSpPr>
+        <p:spPr>
+          <a:xfrm>
+            <a:off x="2590025" y="4876904"/>
+            <a:ext cx="1186200" cy="440100"/>
+          </a:xfrm>
+          <a:prstGeom prst="rect">
+            <a:avLst/>
+          </a:prstGeom>
+          <a:solidFill>
+            <a:schemeClr val="accent1"/>
+          </a:solidFill>
+          <a:ln cap="flat" cmpd="sng" w="9525">
+            <a:solidFill>
+              <a:schemeClr val="dk2"/>
+            </a:solidFill>
+            <a:prstDash val="solid"/>
+            <a:round/>
+            <a:headEnd len="sm" w="sm" type="none"/>
+            <a:tailEnd len="sm" w="sm" type="none"/>
+          </a:ln>
+        </p:spPr>
+        <p:txBody>
+          <a:bodyPr anchorCtr="0" anchor="ctr" bIns="91425" lIns="91425" spcFirstLastPara="1" rIns="91425" wrap="square" tIns="91425">
+            <a:noAutofit/>
+          </a:bodyPr>
+          <a:lstStyle/>
+          <a:p>
+            <a:pPr indent="0" lvl="0" marL="0" rtl="0" algn="ctr">
+              <a:spcBef>
+                <a:spcPts val="0"/>
+              </a:spcBef>
+              <a:spcAft>
+                <a:spcPts val="0"/>
+              </a:spcAft>
+              <a:buNone/>
+            </a:pPr>
+            <a:r>
+              <a:rPr lang="en-US"/>
+              <a:t>Piezobuzzer</a:t>
+            </a:r>
+            <a:endParaRPr/>
+          </a:p>
+        </p:txBody>
+      </p:sp>
+      <p:sp>
+        <p:nvSpPr>
+          <p:cNvPr id="427" name="Google Shape;427;p16"/>
+          <p:cNvSpPr txBox="1"/>
+          <p:nvPr/>
+        </p:nvSpPr>
+        <p:spPr>
+          <a:xfrm>
+            <a:off x="4583350" y="4143750"/>
+            <a:ext cx="717000" cy="358500"/>
+          </a:xfrm>
+          <a:prstGeom prst="rect">
+            <a:avLst/>
+          </a:prstGeom>
+          <a:noFill/>
+          <a:ln>
+            <a:noFill/>
+          </a:ln>
+        </p:spPr>
+        <p:txBody>
+          <a:bodyPr anchorCtr="0" anchor="t" bIns="91425" lIns="91425" spcFirstLastPara="1" rIns="91425" wrap="square" tIns="91425">
+            <a:noAutofit/>
+          </a:bodyPr>
+          <a:lstStyle/>
+          <a:p>
+            <a:pPr indent="0" lvl="0" marL="0" rtl="0" algn="l">
+              <a:spcBef>
+                <a:spcPts val="0"/>
+              </a:spcBef>
+              <a:spcAft>
+                <a:spcPts val="0"/>
+              </a:spcAft>
+              <a:buNone/>
+            </a:pPr>
+            <a:r>
+              <a:rPr lang="en-US" sz="1200">
+                <a:solidFill>
+                  <a:schemeClr val="dk1"/>
+                </a:solidFill>
+              </a:rPr>
+              <a:t>P2_33</a:t>
+            </a:r>
+            <a:endParaRPr sz="1200">
+              <a:solidFill>
+                <a:schemeClr val="dk1"/>
+              </a:solidFill>
+            </a:endParaRPr>
+          </a:p>
+        </p:txBody>
+      </p:sp>
+      <p:sp>
+        <p:nvSpPr>
+          <p:cNvPr id="428" name="Google Shape;428;p16"/>
+          <p:cNvSpPr txBox="1"/>
+          <p:nvPr/>
+        </p:nvSpPr>
+        <p:spPr>
+          <a:xfrm>
+            <a:off x="4700125" y="4502250"/>
+            <a:ext cx="717000" cy="358500"/>
+          </a:xfrm>
+          <a:prstGeom prst="rect">
+            <a:avLst/>
+          </a:prstGeom>
+          <a:noFill/>
+          <a:ln>
+            <a:noFill/>
+          </a:ln>
+        </p:spPr>
+        <p:txBody>
+          <a:bodyPr anchorCtr="0" anchor="t" bIns="91425" lIns="91425" spcFirstLastPara="1" rIns="91425" wrap="square" tIns="91425">
+            <a:noAutofit/>
+          </a:bodyPr>
+          <a:lstStyle/>
+          <a:p>
+            <a:pPr indent="0" lvl="0" marL="0" rtl="0" algn="l">
+              <a:spcBef>
+                <a:spcPts val="0"/>
+              </a:spcBef>
+              <a:spcAft>
+                <a:spcPts val="0"/>
+              </a:spcAft>
+              <a:buNone/>
+            </a:pPr>
+            <a:r>
+              <a:rPr lang="en-US" sz="1200">
+                <a:solidFill>
+                  <a:schemeClr val="dk1"/>
+                </a:solidFill>
+              </a:rPr>
+              <a:t>P2_02</a:t>
+            </a:r>
+            <a:endParaRPr sz="1200">
+              <a:solidFill>
+                <a:schemeClr val="dk1"/>
+              </a:solidFill>
+            </a:endParaRPr>
+          </a:p>
+        </p:txBody>
+      </p:sp>
+      <p:cxnSp>
+        <p:nvCxnSpPr>
+          <p:cNvPr id="429" name="Google Shape;429;p16"/>
+          <p:cNvCxnSpPr>
+            <a:stCxn id="425" idx="3"/>
+          </p:cNvCxnSpPr>
+          <p:nvPr/>
+        </p:nvCxnSpPr>
+        <p:spPr>
+          <a:xfrm flipH="1" rot="10800000">
+            <a:off x="3704975" y="4366188"/>
+            <a:ext cx="971100" cy="101700"/>
+          </a:xfrm>
+          <a:prstGeom prst="straightConnector1">
+            <a:avLst/>
+          </a:prstGeom>
+          <a:noFill/>
+          <a:ln cap="flat" cmpd="sng" w="9525">
+            <a:solidFill>
+              <a:schemeClr val="dk2"/>
+            </a:solidFill>
+            <a:prstDash val="solid"/>
+            <a:round/>
+            <a:headEnd len="med" w="med" type="none"/>
+            <a:tailEnd len="med" w="med" type="none"/>
+          </a:ln>
+        </p:spPr>
+      </p:cxnSp>
+      <p:cxnSp>
+        <p:nvCxnSpPr>
+          <p:cNvPr id="430" name="Google Shape;430;p16"/>
+          <p:cNvCxnSpPr>
+            <a:stCxn id="426" idx="3"/>
+            <a:endCxn id="428" idx="1"/>
+          </p:cNvCxnSpPr>
+          <p:nvPr/>
+        </p:nvCxnSpPr>
+        <p:spPr>
+          <a:xfrm flipH="1" rot="10800000">
+            <a:off x="3776225" y="4681454"/>
+            <a:ext cx="924000" cy="415500"/>
           </a:xfrm>
           <a:prstGeom prst="straightConnector1">
             <a:avLst/>
@@ -20692,12 +20945,12 @@
 </p:sld>
 </file>
 
-<file path=ppt/slides/slide4.xml><?xml version="1.0" encoding="utf-8"?>
+<file path=ppt/slides/slide5.xml><?xml version="1.0" encoding="utf-8"?>
 <p:sld xmlns:a="http://schemas.openxmlformats.org/drawingml/2006/main" xmlns:r="http://schemas.openxmlformats.org/officeDocument/2006/relationships" xmlns:mc="http://schemas.openxmlformats.org/markup-compatibility/2006" xmlns:mv="urn:schemas-microsoft-com:mac:vml" xmlns:p="http://schemas.openxmlformats.org/presentationml/2006/main" xmlns:c="http://schemas.openxmlformats.org/drawingml/2006/chart" xmlns:dgm="http://schemas.openxmlformats.org/drawingml/2006/diagram" xmlns:o="urn:schemas-microsoft-com:office:office" xmlns:v="urn:schemas-microsoft-com:vml" xmlns:pvml="urn:schemas-microsoft-com:office:powerpoint" xmlns:com="http://schemas.openxmlformats.org/drawingml/2006/compatibility" xmlns:p14="http://schemas.microsoft.com/office/powerpoint/2010/main" xmlns:p15="http://schemas.microsoft.com/office/powerpoint/2012/main" xmlns:ahyp="http://schemas.microsoft.com/office/drawing/2018/hyperlinkcolor">
   <p:cSld>
     <p:spTree>
       <p:nvGrpSpPr>
-        <p:cNvPr id="421" name="Shape 421"/>
+        <p:cNvPr id="434" name="Shape 434"/>
         <p:cNvGrpSpPr/>
         <p:nvPr/>
       </p:nvGrpSpPr>
@@ -20711,7 +20964,7 @@
       </p:grpSpPr>
       <p:sp>
         <p:nvSpPr>
-          <p:cNvPr id="422" name="Google Shape;422;p16"/>
+          <p:cNvPr id="435" name="Google Shape;435;p17"/>
           <p:cNvSpPr txBox="1"/>
           <p:nvPr>
             <p:ph type="title"/>
@@ -20763,7 +21016,7 @@
       </p:sp>
       <p:sp>
         <p:nvSpPr>
-          <p:cNvPr id="423" name="Google Shape;423;p16"/>
+          <p:cNvPr id="436" name="Google Shape;436;p17"/>
           <p:cNvSpPr/>
           <p:nvPr/>
         </p:nvSpPr>
@@ -20815,7 +21068,7 @@
       </p:sp>
       <p:sp>
         <p:nvSpPr>
-          <p:cNvPr id="424" name="Google Shape;424;p16"/>
+          <p:cNvPr id="437" name="Google Shape;437;p17"/>
           <p:cNvSpPr/>
           <p:nvPr/>
         </p:nvSpPr>
@@ -20865,14 +21118,14 @@
       </p:sp>
       <p:sp>
         <p:nvSpPr>
-          <p:cNvPr id="425" name="Google Shape;425;p16"/>
+          <p:cNvPr id="438" name="Google Shape;438;p17"/>
           <p:cNvSpPr/>
           <p:nvPr/>
         </p:nvSpPr>
         <p:spPr>
           <a:xfrm>
-            <a:off x="9074500" y="4343350"/>
-            <a:ext cx="1717500" cy="571500"/>
+            <a:off x="9074575" y="2610625"/>
+            <a:ext cx="1717500" cy="1449600"/>
           </a:xfrm>
           <a:prstGeom prst="rect">
             <a:avLst/>
@@ -20911,40 +21164,6 @@
             </a:r>
             <a:endParaRPr/>
           </a:p>
-        </p:txBody>
-      </p:sp>
-      <p:sp>
-        <p:nvSpPr>
-          <p:cNvPr id="426" name="Google Shape;426;p16"/>
-          <p:cNvSpPr/>
-          <p:nvPr/>
-        </p:nvSpPr>
-        <p:spPr>
-          <a:xfrm>
-            <a:off x="8991375" y="1371600"/>
-            <a:ext cx="1717500" cy="571500"/>
-          </a:xfrm>
-          <a:prstGeom prst="rect">
-            <a:avLst/>
-          </a:prstGeom>
-          <a:solidFill>
-            <a:schemeClr val="accent1"/>
-          </a:solidFill>
-          <a:ln cap="flat" cmpd="sng" w="9525">
-            <a:solidFill>
-              <a:schemeClr val="dk2"/>
-            </a:solidFill>
-            <a:prstDash val="solid"/>
-            <a:round/>
-            <a:headEnd len="sm" w="sm" type="none"/>
-            <a:tailEnd len="sm" w="sm" type="none"/>
-          </a:ln>
-        </p:spPr>
-        <p:txBody>
-          <a:bodyPr anchorCtr="0" anchor="ctr" bIns="91425" lIns="91425" spcFirstLastPara="1" rIns="91425" wrap="square" tIns="91425">
-            <a:noAutofit/>
-          </a:bodyPr>
-          <a:lstStyle/>
           <a:p>
             <a:pPr indent="0" lvl="0" marL="0" rtl="0" algn="ctr">
               <a:spcBef>
@@ -20957,7 +21176,39 @@
             </a:pPr>
             <a:r>
               <a:rPr lang="en-US"/>
-              <a:t>LCD Screen</a:t>
+              <a:t>LED</a:t>
+            </a:r>
+            <a:endParaRPr/>
+          </a:p>
+          <a:p>
+            <a:pPr indent="0" lvl="0" marL="0" rtl="0" algn="ctr">
+              <a:spcBef>
+                <a:spcPts val="0"/>
+              </a:spcBef>
+              <a:spcAft>
+                <a:spcPts val="0"/>
+              </a:spcAft>
+              <a:buNone/>
+            </a:pPr>
+            <a:r>
+              <a:rPr lang="en-US"/>
+              <a:t>Piezobuzzer</a:t>
+            </a:r>
+            <a:endParaRPr/>
+          </a:p>
+          <a:p>
+            <a:pPr indent="0" lvl="0" marL="0" rtl="0" algn="ctr">
+              <a:spcBef>
+                <a:spcPts val="0"/>
+              </a:spcBef>
+              <a:spcAft>
+                <a:spcPts val="0"/>
+              </a:spcAft>
+              <a:buNone/>
+            </a:pPr>
+            <a:r>
+              <a:rPr lang="en-US"/>
+              <a:t>display</a:t>
             </a:r>
             <a:endParaRPr/>
           </a:p>
@@ -20965,10 +21216,10 @@
       </p:sp>
       <p:cxnSp>
         <p:nvCxnSpPr>
-          <p:cNvPr id="427" name="Google Shape;427;p16"/>
+          <p:cNvPr id="439" name="Google Shape;439;p17"/>
           <p:cNvCxnSpPr>
-            <a:stCxn id="424" idx="3"/>
-            <a:endCxn id="423" idx="1"/>
+            <a:stCxn id="437" idx="3"/>
+            <a:endCxn id="436" idx="1"/>
           </p:cNvCxnSpPr>
           <p:nvPr/>
         </p:nvCxnSpPr>
@@ -20994,52 +21245,21 @@
       </p:cxnSp>
       <p:cxnSp>
         <p:nvCxnSpPr>
-          <p:cNvPr id="428" name="Google Shape;428;p16"/>
+          <p:cNvPr id="440" name="Google Shape;440;p17"/>
           <p:cNvCxnSpPr>
-            <a:stCxn id="423" idx="3"/>
-            <a:endCxn id="426" idx="1"/>
-          </p:cNvCxnSpPr>
-          <p:nvPr/>
-        </p:nvCxnSpPr>
-        <p:spPr>
-          <a:xfrm flipH="1" rot="10800000">
-            <a:off x="7555975" y="1657275"/>
-            <a:ext cx="1435500" cy="1678200"/>
-          </a:xfrm>
-          <a:prstGeom prst="bentConnector3">
-            <a:avLst>
-              <a:gd fmla="val 49997" name="adj1"/>
-            </a:avLst>
-          </a:prstGeom>
-          <a:noFill/>
-          <a:ln cap="flat" cmpd="sng" w="9525">
-            <a:solidFill>
-              <a:schemeClr val="dk2"/>
-            </a:solidFill>
-            <a:prstDash val="solid"/>
-            <a:round/>
-            <a:headEnd len="med" w="med" type="none"/>
-            <a:tailEnd len="med" w="med" type="stealth"/>
-          </a:ln>
-        </p:spPr>
-      </p:cxnSp>
-      <p:cxnSp>
-        <p:nvCxnSpPr>
-          <p:cNvPr id="429" name="Google Shape;429;p16"/>
-          <p:cNvCxnSpPr>
-            <a:stCxn id="423" idx="3"/>
-            <a:endCxn id="425" idx="1"/>
+            <a:stCxn id="436" idx="3"/>
+            <a:endCxn id="438" idx="1"/>
           </p:cNvCxnSpPr>
           <p:nvPr/>
         </p:nvCxnSpPr>
         <p:spPr>
           <a:xfrm>
             <a:off x="7555975" y="3335475"/>
-            <a:ext cx="1518600" cy="1293600"/>
+            <a:ext cx="1518600" cy="600"/>
           </a:xfrm>
           <a:prstGeom prst="bentConnector3">
             <a:avLst>
-              <a:gd fmla="val 49998" name="adj1"/>
+              <a:gd fmla="val 50000" name="adj1"/>
             </a:avLst>
           </a:prstGeom>
           <a:noFill/>
@@ -21056,7 +21276,7 @@
       </p:cxnSp>
       <p:sp>
         <p:nvSpPr>
-          <p:cNvPr id="430" name="Google Shape;430;p16"/>
+          <p:cNvPr id="441" name="Google Shape;441;p17"/>
           <p:cNvSpPr txBox="1"/>
           <p:nvPr/>
         </p:nvSpPr>
@@ -21106,63 +21326,13 @@
       </p:sp>
       <p:sp>
         <p:nvSpPr>
-          <p:cNvPr id="431" name="Google Shape;431;p16"/>
+          <p:cNvPr id="442" name="Google Shape;442;p17"/>
           <p:cNvSpPr txBox="1"/>
           <p:nvPr/>
         </p:nvSpPr>
         <p:spPr>
           <a:xfrm>
-            <a:off x="8271200" y="1207838"/>
-            <a:ext cx="644100" cy="384600"/>
-          </a:xfrm>
-          <a:prstGeom prst="rect">
-            <a:avLst/>
-          </a:prstGeom>
-          <a:noFill/>
-          <a:ln>
-            <a:noFill/>
-          </a:ln>
-        </p:spPr>
-        <p:txBody>
-          <a:bodyPr anchorCtr="0" anchor="t" bIns="91425" lIns="91425" spcFirstLastPara="1" rIns="91425" wrap="square" tIns="91425">
-            <a:noAutofit/>
-          </a:bodyPr>
-          <a:lstStyle/>
-          <a:p>
-            <a:pPr indent="0" lvl="0" marL="0" rtl="0" algn="l">
-              <a:spcBef>
-                <a:spcPts val="0"/>
-              </a:spcBef>
-              <a:spcAft>
-                <a:spcPts val="0"/>
-              </a:spcAft>
-              <a:buNone/>
-            </a:pPr>
-            <a:r>
-              <a:rPr lang="en-US" sz="1500">
-                <a:solidFill>
-                  <a:schemeClr val="dk1"/>
-                </a:solidFill>
-              </a:rPr>
-              <a:t>5V</a:t>
-            </a:r>
-            <a:endParaRPr sz="1500">
-              <a:solidFill>
-                <a:schemeClr val="dk1"/>
-              </a:solidFill>
-            </a:endParaRPr>
-          </a:p>
-        </p:txBody>
-      </p:sp>
-      <p:sp>
-        <p:nvSpPr>
-          <p:cNvPr id="432" name="Google Shape;432;p16"/>
-          <p:cNvSpPr txBox="1"/>
-          <p:nvPr/>
-        </p:nvSpPr>
-        <p:spPr>
-          <a:xfrm>
-            <a:off x="8347375" y="4244463"/>
+            <a:off x="7993225" y="3621213"/>
             <a:ext cx="644100" cy="384600"/>
           </a:xfrm>
           <a:prstGeom prst="rect">
@@ -21224,12 +21394,12 @@
 </p:sld>
 </file>
 
-<file path=ppt/slides/slide5.xml><?xml version="1.0" encoding="utf-8"?>
+<file path=ppt/slides/slide6.xml><?xml version="1.0" encoding="utf-8"?>
 <p:sld xmlns:a="http://schemas.openxmlformats.org/drawingml/2006/main" xmlns:r="http://schemas.openxmlformats.org/officeDocument/2006/relationships" xmlns:mc="http://schemas.openxmlformats.org/markup-compatibility/2006" xmlns:mv="urn:schemas-microsoft-com:mac:vml" xmlns:p="http://schemas.openxmlformats.org/presentationml/2006/main" xmlns:c="http://schemas.openxmlformats.org/drawingml/2006/chart" xmlns:dgm="http://schemas.openxmlformats.org/drawingml/2006/diagram" xmlns:o="urn:schemas-microsoft-com:office:office" xmlns:v="urn:schemas-microsoft-com:vml" xmlns:pvml="urn:schemas-microsoft-com:office:powerpoint" xmlns:com="http://schemas.openxmlformats.org/drawingml/2006/compatibility" xmlns:p14="http://schemas.microsoft.com/office/powerpoint/2010/main" xmlns:p15="http://schemas.microsoft.com/office/powerpoint/2012/main" xmlns:ahyp="http://schemas.microsoft.com/office/drawing/2018/hyperlinkcolor">
   <p:cSld>
     <p:spTree>
       <p:nvGrpSpPr>
-        <p:cNvPr id="436" name="Shape 436"/>
+        <p:cNvPr id="446" name="Shape 446"/>
         <p:cNvGrpSpPr/>
         <p:nvPr/>
       </p:nvGrpSpPr>
@@ -21243,7 +21413,7 @@
       </p:grpSpPr>
       <p:sp>
         <p:nvSpPr>
-          <p:cNvPr id="437" name="Google Shape;437;p17"/>
+          <p:cNvPr id="447" name="Google Shape;447;p18"/>
           <p:cNvSpPr txBox="1"/>
           <p:nvPr>
             <p:ph type="title"/>
@@ -21295,7 +21465,7 @@
       </p:sp>
       <p:graphicFrame>
         <p:nvGraphicFramePr>
-          <p:cNvPr id="438" name="Google Shape;438;p17"/>
+          <p:cNvPr id="448" name="Google Shape;448;p18"/>
           <p:cNvGraphicFramePr/>
           <p:nvPr/>
         </p:nvGraphicFramePr>
@@ -21308,7 +21478,7 @@
             <a:tbl>
               <a:tblPr bandRow="1" firstRow="1">
                 <a:noFill/>
-                <a:tableStyleId>{431AAE86-597A-40D9-BAE6-D5E806EC37A1}</a:tableStyleId>
+                <a:tableStyleId>{E0F1AD35-00AB-439C-BF76-2F3B06186C07}</a:tableStyleId>
               </a:tblPr>
               <a:tblGrid>
                 <a:gridCol w="7837725"/>
@@ -21494,7 +21664,19 @@
                           </a:solidFill>
                           <a:hlinkClick r:id="rId3"/>
                         </a:rPr>
-                        <a:t>LCD Screen</a:t>
+                        <a:t>Display</a:t>
+                      </a:r>
+                      <a:r>
+                        <a:rPr lang="en-US" sz="1800"/>
+                        <a:t> (happy to switch for something better, just wanted </a:t>
+                      </a:r>
+                      <a:r>
+                        <a:rPr lang="en-US" sz="1800"/>
+                        <a:t>something</a:t>
+                      </a:r>
+                      <a:r>
+                        <a:rPr lang="en-US" sz="1800"/>
+                        <a:t> w/out touchscreen)</a:t>
                       </a:r>
                       <a:endParaRPr sz="1800"/>
                     </a:p>
@@ -21540,7 +21722,7 @@
                       </a:pPr>
                       <a:r>
                         <a:rPr lang="en-US" sz="1800"/>
-                        <a:t>$9.95</a:t>
+                        <a:t>$18.49</a:t>
                       </a:r>
                       <a:endParaRPr sz="1800"/>
                     </a:p>
@@ -21894,7 +22076,7 @@
       </p:graphicFrame>
       <p:sp>
         <p:nvSpPr>
-          <p:cNvPr id="439" name="Google Shape;439;p17"/>
+          <p:cNvPr id="449" name="Google Shape;449;p18"/>
           <p:cNvSpPr txBox="1"/>
           <p:nvPr/>
         </p:nvSpPr>
@@ -21937,433 +22119,6 @@
                 <a:sym typeface="Arial"/>
               </a:rPr>
               <a:t>See Next Slide for Instructions</a:t>
-            </a:r>
-            <a:endParaRPr/>
-          </a:p>
-        </p:txBody>
-      </p:sp>
-    </p:spTree>
-  </p:cSld>
-  <p:clrMapOvr>
-    <a:masterClrMapping/>
-  </p:clrMapOvr>
-  <mc:AlternateContent>
-    <mc:Choice Requires="p14">
-      <p:transition spd="slow" p14:dur="700">
-        <p:fade/>
-      </p:transition>
-    </mc:Choice>
-    <mc:Fallback>
-      <p:transition spd="slow">
-        <p:fade/>
-      </p:transition>
-    </mc:Fallback>
-  </mc:AlternateContent>
-</p:sld>
-</file>
-
-<file path=ppt/slides/slide6.xml><?xml version="1.0" encoding="utf-8"?>
-<p:sld xmlns:a="http://schemas.openxmlformats.org/drawingml/2006/main" xmlns:r="http://schemas.openxmlformats.org/officeDocument/2006/relationships" xmlns:mc="http://schemas.openxmlformats.org/markup-compatibility/2006" xmlns:mv="urn:schemas-microsoft-com:mac:vml" xmlns:p="http://schemas.openxmlformats.org/presentationml/2006/main" xmlns:c="http://schemas.openxmlformats.org/drawingml/2006/chart" xmlns:dgm="http://schemas.openxmlformats.org/drawingml/2006/diagram" xmlns:o="urn:schemas-microsoft-com:office:office" xmlns:v="urn:schemas-microsoft-com:vml" xmlns:pvml="urn:schemas-microsoft-com:office:powerpoint" xmlns:com="http://schemas.openxmlformats.org/drawingml/2006/compatibility" xmlns:p14="http://schemas.microsoft.com/office/powerpoint/2010/main" xmlns:p15="http://schemas.microsoft.com/office/powerpoint/2012/main" xmlns:ahyp="http://schemas.microsoft.com/office/drawing/2018/hyperlinkcolor">
-  <p:cSld>
-    <p:spTree>
-      <p:nvGrpSpPr>
-        <p:cNvPr id="443" name="Shape 443"/>
-        <p:cNvGrpSpPr/>
-        <p:nvPr/>
-      </p:nvGrpSpPr>
-      <p:grpSpPr>
-        <a:xfrm>
-          <a:off x="0" y="0"/>
-          <a:ext cx="0" cy="0"/>
-          <a:chOff x="0" y="0"/>
-          <a:chExt cx="0" cy="0"/>
-        </a:xfrm>
-      </p:grpSpPr>
-      <p:sp>
-        <p:nvSpPr>
-          <p:cNvPr id="444" name="Google Shape;444;p18"/>
-          <p:cNvSpPr txBox="1"/>
-          <p:nvPr>
-            <p:ph type="title"/>
-          </p:nvPr>
-        </p:nvSpPr>
-        <p:spPr>
-          <a:xfrm>
-            <a:off x="609600" y="228600"/>
-            <a:ext cx="10972800" cy="914401"/>
-          </a:xfrm>
-          <a:prstGeom prst="rect">
-            <a:avLst/>
-          </a:prstGeom>
-          <a:noFill/>
-          <a:ln>
-            <a:noFill/>
-          </a:ln>
-        </p:spPr>
-        <p:txBody>
-          <a:bodyPr anchorCtr="0" anchor="b" bIns="45700" lIns="91425" spcFirstLastPara="1" rIns="91425" wrap="square" tIns="45700">
-            <a:normAutofit/>
-          </a:bodyPr>
-          <a:lstStyle/>
-          <a:p>
-            <a:pPr indent="0" lvl="0" marL="0" rtl="0" algn="l">
-              <a:lnSpc>
-                <a:spcPct val="90000"/>
-              </a:lnSpc>
-              <a:spcBef>
-                <a:spcPts val="0"/>
-              </a:spcBef>
-              <a:spcAft>
-                <a:spcPts val="0"/>
-              </a:spcAft>
-              <a:buClr>
-                <a:srgbClr val="276E8B"/>
-              </a:buClr>
-              <a:buSzPts val="3200"/>
-              <a:buFont typeface="Arial"/>
-              <a:buNone/>
-            </a:pPr>
-            <a:r>
-              <a:rPr lang="en-US"/>
-              <a:t>Component Selection (Remove slide for submission)</a:t>
-            </a:r>
-            <a:endParaRPr/>
-          </a:p>
-        </p:txBody>
-      </p:sp>
-      <p:sp>
-        <p:nvSpPr>
-          <p:cNvPr id="445" name="Google Shape;445;p18"/>
-          <p:cNvSpPr txBox="1"/>
-          <p:nvPr>
-            <p:ph idx="1" type="body"/>
-          </p:nvPr>
-        </p:nvSpPr>
-        <p:spPr>
-          <a:xfrm>
-            <a:off x="609600" y="1295400"/>
-            <a:ext cx="10972800" cy="4724399"/>
-          </a:xfrm>
-          <a:prstGeom prst="rect">
-            <a:avLst/>
-          </a:prstGeom>
-          <a:noFill/>
-          <a:ln>
-            <a:noFill/>
-          </a:ln>
-        </p:spPr>
-        <p:txBody>
-          <a:bodyPr anchorCtr="0" anchor="t" bIns="45700" lIns="91425" spcFirstLastPara="1" rIns="91425" wrap="square" tIns="45700">
-            <a:normAutofit/>
-          </a:bodyPr>
-          <a:lstStyle/>
-          <a:p>
-            <a:pPr indent="-228600" lvl="0" marL="228600" rtl="0" algn="l">
-              <a:lnSpc>
-                <a:spcPct val="90000"/>
-              </a:lnSpc>
-              <a:spcBef>
-                <a:spcPts val="0"/>
-              </a:spcBef>
-              <a:spcAft>
-                <a:spcPts val="0"/>
-              </a:spcAft>
-              <a:buSzPts val="2000"/>
-              <a:buChar char="▪"/>
-            </a:pPr>
-            <a:r>
-              <a:rPr lang="en-US"/>
-              <a:t>All components must be from either:  </a:t>
-            </a:r>
-            <a:r>
-              <a:rPr lang="en-US" u="sng">
-                <a:solidFill>
-                  <a:schemeClr val="hlink"/>
-                </a:solidFill>
-                <a:hlinkClick r:id="rId3"/>
-              </a:rPr>
-              <a:t>Amazon</a:t>
-            </a:r>
-            <a:r>
-              <a:rPr lang="en-US"/>
-              <a:t>, </a:t>
-            </a:r>
-            <a:r>
-              <a:rPr lang="en-US" u="sng">
-                <a:solidFill>
-                  <a:schemeClr val="hlink"/>
-                </a:solidFill>
-                <a:hlinkClick r:id="rId4"/>
-              </a:rPr>
-              <a:t>Adafruit</a:t>
-            </a:r>
-            <a:r>
-              <a:rPr lang="en-US"/>
-              <a:t>, </a:t>
-            </a:r>
-            <a:r>
-              <a:rPr lang="en-US" u="sng">
-                <a:solidFill>
-                  <a:schemeClr val="hlink"/>
-                </a:solidFill>
-                <a:hlinkClick r:id="rId5"/>
-              </a:rPr>
-              <a:t>Sparkfun</a:t>
-            </a:r>
-            <a:r>
-              <a:rPr lang="en-US"/>
-              <a:t>, </a:t>
-            </a:r>
-            <a:r>
-              <a:rPr lang="en-US" u="sng">
-                <a:solidFill>
-                  <a:schemeClr val="hlink"/>
-                </a:solidFill>
-                <a:hlinkClick r:id="rId6"/>
-              </a:rPr>
-              <a:t>Digi-Key</a:t>
-            </a:r>
-            <a:r>
-              <a:rPr lang="en-US"/>
-              <a:t>, or </a:t>
-            </a:r>
-            <a:r>
-              <a:rPr lang="en-US" u="sng">
-                <a:solidFill>
-                  <a:schemeClr val="hlink"/>
-                </a:solidFill>
-                <a:hlinkClick r:id="rId7"/>
-              </a:rPr>
-              <a:t>Mouser</a:t>
-            </a:r>
-            <a:endParaRPr/>
-          </a:p>
-          <a:p>
-            <a:pPr indent="-228600" lvl="0" marL="228600" rtl="0" algn="l">
-              <a:lnSpc>
-                <a:spcPct val="90000"/>
-              </a:lnSpc>
-              <a:spcBef>
-                <a:spcPts val="1800"/>
-              </a:spcBef>
-              <a:spcAft>
-                <a:spcPts val="0"/>
-              </a:spcAft>
-              <a:buSzPts val="2000"/>
-              <a:buChar char="▪"/>
-            </a:pPr>
-            <a:r>
-              <a:rPr lang="en-US"/>
-              <a:t>Select no more than two (2) components that are not on approved component spreadsheet</a:t>
-            </a:r>
-            <a:endParaRPr/>
-          </a:p>
-          <a:p>
-            <a:pPr indent="-182880" lvl="1" marL="457200" rtl="0" algn="l">
-              <a:lnSpc>
-                <a:spcPct val="90000"/>
-              </a:lnSpc>
-              <a:spcBef>
-                <a:spcPts val="1200"/>
-              </a:spcBef>
-              <a:spcAft>
-                <a:spcPts val="0"/>
-              </a:spcAft>
-              <a:buSzPts val="1800"/>
-              <a:buChar char="▪"/>
-            </a:pPr>
-            <a:r>
-              <a:rPr lang="en-US"/>
-              <a:t>See Canvas 🡪 Files 🡪 assignments 🡪 EDES301_project_01_parts_list.xlsx</a:t>
-            </a:r>
-            <a:endParaRPr/>
-          </a:p>
-          <a:p>
-            <a:pPr indent="-182880" lvl="1" marL="457200" rtl="0" algn="l">
-              <a:lnSpc>
-                <a:spcPct val="90000"/>
-              </a:lnSpc>
-              <a:spcBef>
-                <a:spcPts val="1200"/>
-              </a:spcBef>
-              <a:spcAft>
-                <a:spcPts val="0"/>
-              </a:spcAft>
-              <a:buSzPts val="1800"/>
-              <a:buChar char="▪"/>
-            </a:pPr>
-            <a:r>
-              <a:rPr lang="en-US"/>
-              <a:t>If there is a cheaper part that you would like to use, we can discuss in the project meeting</a:t>
-            </a:r>
-            <a:endParaRPr/>
-          </a:p>
-          <a:p>
-            <a:pPr indent="-228600" lvl="0" marL="228600" rtl="0" algn="l">
-              <a:lnSpc>
-                <a:spcPct val="90000"/>
-              </a:lnSpc>
-              <a:spcBef>
-                <a:spcPts val="1800"/>
-              </a:spcBef>
-              <a:spcAft>
-                <a:spcPts val="0"/>
-              </a:spcAft>
-              <a:buSzPts val="2000"/>
-              <a:buChar char="▪"/>
-            </a:pPr>
-            <a:r>
-              <a:rPr lang="en-US"/>
-              <a:t>All components needed for the project should be listed on Slide 5</a:t>
-            </a:r>
-            <a:endParaRPr/>
-          </a:p>
-          <a:p>
-            <a:pPr indent="-228600" lvl="0" marL="228600" rtl="0" algn="l">
-              <a:lnSpc>
-                <a:spcPct val="90000"/>
-              </a:lnSpc>
-              <a:spcBef>
-                <a:spcPts val="1800"/>
-              </a:spcBef>
-              <a:spcAft>
-                <a:spcPts val="0"/>
-              </a:spcAft>
-              <a:buSzPts val="2000"/>
-              <a:buChar char="▪"/>
-            </a:pPr>
-            <a:r>
-              <a:rPr lang="en-US"/>
-              <a:t>All components should have links to the website where they can be purchased</a:t>
-            </a:r>
-            <a:endParaRPr/>
-          </a:p>
-          <a:p>
-            <a:pPr indent="-182880" lvl="1" marL="457200" rtl="0" algn="l">
-              <a:lnSpc>
-                <a:spcPct val="90000"/>
-              </a:lnSpc>
-              <a:spcBef>
-                <a:spcPts val="1200"/>
-              </a:spcBef>
-              <a:spcAft>
-                <a:spcPts val="0"/>
-              </a:spcAft>
-              <a:buSzPts val="1800"/>
-              <a:buChar char="▪"/>
-            </a:pPr>
-            <a:r>
-              <a:rPr lang="en-US"/>
-              <a:t>Please trim URLs for links to Amazon</a:t>
-            </a:r>
-            <a:endParaRPr/>
-          </a:p>
-          <a:p>
-            <a:pPr indent="-228600" lvl="0" marL="228600" rtl="0" algn="l">
-              <a:lnSpc>
-                <a:spcPct val="90000"/>
-              </a:lnSpc>
-              <a:spcBef>
-                <a:spcPts val="1800"/>
-              </a:spcBef>
-              <a:spcAft>
-                <a:spcPts val="0"/>
-              </a:spcAft>
-              <a:buSzPts val="2000"/>
-              <a:buChar char="▪"/>
-            </a:pPr>
-            <a:r>
-              <a:rPr lang="en-US"/>
-              <a:t>EDES301 will supplement $25 to $35 dollars for components</a:t>
-            </a:r>
-            <a:endParaRPr/>
-          </a:p>
-          <a:p>
-            <a:pPr indent="-182880" lvl="1" marL="457200" rtl="0" algn="l">
-              <a:lnSpc>
-                <a:spcPct val="90000"/>
-              </a:lnSpc>
-              <a:spcBef>
-                <a:spcPts val="1200"/>
-              </a:spcBef>
-              <a:spcAft>
-                <a:spcPts val="0"/>
-              </a:spcAft>
-              <a:buSzPts val="1800"/>
-              <a:buChar char="▪"/>
-            </a:pPr>
-            <a:r>
-              <a:rPr lang="en-US"/>
-              <a:t>Please indicate what components need to be purchased by EDES301</a:t>
-            </a:r>
-            <a:endParaRPr/>
-          </a:p>
-          <a:p>
-            <a:pPr indent="-101600" lvl="0" marL="228600" rtl="0" algn="l">
-              <a:lnSpc>
-                <a:spcPct val="90000"/>
-              </a:lnSpc>
-              <a:spcBef>
-                <a:spcPts val="1800"/>
-              </a:spcBef>
-              <a:spcAft>
-                <a:spcPts val="0"/>
-              </a:spcAft>
-              <a:buSzPts val="2000"/>
-              <a:buNone/>
-            </a:pPr>
-            <a:r>
-              <a:t/>
-            </a:r>
-            <a:endParaRPr/>
-          </a:p>
-        </p:txBody>
-      </p:sp>
-      <p:sp>
-        <p:nvSpPr>
-          <p:cNvPr id="446" name="Google Shape;446;p18"/>
-          <p:cNvSpPr txBox="1"/>
-          <p:nvPr/>
-        </p:nvSpPr>
-        <p:spPr>
-          <a:xfrm>
-            <a:off x="2590800" y="6286500"/>
-            <a:ext cx="7083991" cy="369332"/>
-          </a:xfrm>
-          <a:prstGeom prst="rect">
-            <a:avLst/>
-          </a:prstGeom>
-          <a:noFill/>
-          <a:ln>
-            <a:noFill/>
-          </a:ln>
-        </p:spPr>
-        <p:txBody>
-          <a:bodyPr anchorCtr="0" anchor="t" bIns="45700" lIns="91425" spcFirstLastPara="1" rIns="91425" wrap="square" tIns="45700">
-            <a:spAutoFit/>
-          </a:bodyPr>
-          <a:lstStyle/>
-          <a:p>
-            <a:pPr indent="0" lvl="0" marL="0" marR="0" rtl="0" algn="l">
-              <a:spcBef>
-                <a:spcPts val="0"/>
-              </a:spcBef>
-              <a:spcAft>
-                <a:spcPts val="0"/>
-              </a:spcAft>
-              <a:buNone/>
-            </a:pPr>
-            <a:r>
-              <a:rPr lang="en-US" sz="1800">
-                <a:solidFill>
-                  <a:schemeClr val="dk1"/>
-                </a:solidFill>
-                <a:latin typeface="Arial"/>
-                <a:ea typeface="Arial"/>
-                <a:cs typeface="Arial"/>
-                <a:sym typeface="Arial"/>
-              </a:rPr>
-              <a:t>If you have a special request, we can discuss in the project meeting</a:t>
             </a:r>
             <a:endParaRPr/>
           </a:p>

--- a/project_01/docs/Yellen_EDES301_project_01_proposal.pptx
+++ b/project_01/docs/Yellen_EDES301_project_01_proposal.pptx
@@ -14,6 +14,9 @@
     <p:sldId id="259" r:id="rId10"/>
     <p:sldId id="260" r:id="rId11"/>
     <p:sldId id="261" r:id="rId12"/>
+    <p:sldId id="262" r:id="rId13"/>
+    <p:sldId id="263" r:id="rId14"/>
+    <p:sldId id="264" r:id="rId15"/>
   </p:sldIdLst>
   <p:sldSz cy="6858000" cx="12192000"/>
   <p:notesSz cx="6858000" cy="9144000"/>
@@ -1947,7 +1950,7 @@
       </p:grpSpPr>
       <p:sp>
         <p:nvSpPr>
-          <p:cNvPr id="444" name="Google Shape;444;p5:notes"/>
+          <p:cNvPr id="444" name="Google Shape;444;had7486201f07822_0_0:notes"/>
           <p:cNvSpPr txBox="1"/>
           <p:nvPr>
             <p:ph idx="1" type="body"/>
@@ -1986,7 +1989,304 @@
       </p:sp>
       <p:sp>
         <p:nvSpPr>
-          <p:cNvPr id="445" name="Google Shape;445;p5:notes"/>
+          <p:cNvPr id="445" name="Google Shape;445;had7486201f07822_0_0:notes"/>
+          <p:cNvSpPr/>
+          <p:nvPr>
+            <p:ph idx="2" type="sldImg"/>
+          </p:nvPr>
+        </p:nvSpPr>
+        <p:spPr>
+          <a:xfrm>
+            <a:off x="685800" y="1143000"/>
+            <a:ext cx="5486400" cy="3086100"/>
+          </a:xfrm>
+          <a:custGeom>
+            <a:rect b="b" l="l" r="r" t="t"/>
+            <a:pathLst>
+              <a:path extrusionOk="0" h="120000" w="120000">
+                <a:moveTo>
+                  <a:pt x="0" y="0"/>
+                </a:moveTo>
+                <a:lnTo>
+                  <a:pt x="120000" y="0"/>
+                </a:lnTo>
+                <a:lnTo>
+                  <a:pt x="120000" y="120000"/>
+                </a:lnTo>
+                <a:lnTo>
+                  <a:pt x="0" y="120000"/>
+                </a:lnTo>
+                <a:close/>
+              </a:path>
+            </a:pathLst>
+          </a:custGeom>
+        </p:spPr>
+      </p:sp>
+    </p:spTree>
+  </p:cSld>
+  <p:clrMapOvr>
+    <a:masterClrMapping/>
+  </p:clrMapOvr>
+</p:notes>
+</file>
+
+<file path=ppt/notesSlides/notesSlide7.xml><?xml version="1.0" encoding="utf-8"?>
+<p:notes xmlns:a="http://schemas.openxmlformats.org/drawingml/2006/main" xmlns:r="http://schemas.openxmlformats.org/officeDocument/2006/relationships" xmlns:mc="http://schemas.openxmlformats.org/markup-compatibility/2006" xmlns:mv="urn:schemas-microsoft-com:mac:vml" xmlns:p="http://schemas.openxmlformats.org/presentationml/2006/main" xmlns:c="http://schemas.openxmlformats.org/drawingml/2006/chart" xmlns:dgm="http://schemas.openxmlformats.org/drawingml/2006/diagram" xmlns:o="urn:schemas-microsoft-com:office:office" xmlns:v="urn:schemas-microsoft-com:vml" xmlns:pvml="urn:schemas-microsoft-com:office:powerpoint" xmlns:com="http://schemas.openxmlformats.org/drawingml/2006/compatibility" xmlns:p14="http://schemas.microsoft.com/office/powerpoint/2010/main" xmlns:p15="http://schemas.microsoft.com/office/powerpoint/2012/main" xmlns:ahyp="http://schemas.microsoft.com/office/drawing/2018/hyperlinkcolor" showMasterPhAnim="0" showMasterSp="0">
+  <p:cSld>
+    <p:spTree>
+      <p:nvGrpSpPr>
+        <p:cNvPr id="484" name="Shape 484"/>
+        <p:cNvGrpSpPr/>
+        <p:nvPr/>
+      </p:nvGrpSpPr>
+      <p:grpSpPr>
+        <a:xfrm>
+          <a:off x="0" y="0"/>
+          <a:ext cx="0" cy="0"/>
+          <a:chOff x="0" y="0"/>
+          <a:chExt cx="0" cy="0"/>
+        </a:xfrm>
+      </p:grpSpPr>
+      <p:sp>
+        <p:nvSpPr>
+          <p:cNvPr id="485" name="Google Shape;485;h4db1e5819fb5c0f_0_3:notes"/>
+          <p:cNvSpPr txBox="1"/>
+          <p:nvPr>
+            <p:ph idx="1" type="body"/>
+          </p:nvPr>
+        </p:nvSpPr>
+        <p:spPr>
+          <a:xfrm>
+            <a:off x="685800" y="4400550"/>
+            <a:ext cx="5486400" cy="3086100"/>
+          </a:xfrm>
+          <a:prstGeom prst="rect">
+            <a:avLst/>
+          </a:prstGeom>
+        </p:spPr>
+        <p:txBody>
+          <a:bodyPr anchorCtr="0" anchor="t" bIns="45700" lIns="91425" spcFirstLastPara="1" rIns="91425" wrap="square" tIns="45700">
+            <a:noAutofit/>
+          </a:bodyPr>
+          <a:lstStyle/>
+          <a:p>
+            <a:pPr indent="0" lvl="0" marL="0" rtl="0" algn="l">
+              <a:spcBef>
+                <a:spcPts val="0"/>
+              </a:spcBef>
+              <a:spcAft>
+                <a:spcPts val="0"/>
+              </a:spcAft>
+              <a:buNone/>
+            </a:pPr>
+            <a:r>
+              <a:t/>
+            </a:r>
+            <a:endParaRPr/>
+          </a:p>
+        </p:txBody>
+      </p:sp>
+      <p:sp>
+        <p:nvSpPr>
+          <p:cNvPr id="486" name="Google Shape;486;h4db1e5819fb5c0f_0_3:notes"/>
+          <p:cNvSpPr/>
+          <p:nvPr>
+            <p:ph idx="2" type="sldImg"/>
+          </p:nvPr>
+        </p:nvSpPr>
+        <p:spPr>
+          <a:xfrm>
+            <a:off x="685800" y="1143000"/>
+            <a:ext cx="5486400" cy="3086100"/>
+          </a:xfrm>
+          <a:custGeom>
+            <a:rect b="b" l="l" r="r" t="t"/>
+            <a:pathLst>
+              <a:path extrusionOk="0" h="120000" w="120000">
+                <a:moveTo>
+                  <a:pt x="0" y="0"/>
+                </a:moveTo>
+                <a:lnTo>
+                  <a:pt x="120000" y="0"/>
+                </a:lnTo>
+                <a:lnTo>
+                  <a:pt x="120000" y="120000"/>
+                </a:lnTo>
+                <a:lnTo>
+                  <a:pt x="0" y="120000"/>
+                </a:lnTo>
+                <a:close/>
+              </a:path>
+            </a:pathLst>
+          </a:custGeom>
+        </p:spPr>
+      </p:sp>
+    </p:spTree>
+  </p:cSld>
+  <p:clrMapOvr>
+    <a:masterClrMapping/>
+  </p:clrMapOvr>
+</p:notes>
+</file>
+
+<file path=ppt/notesSlides/notesSlide8.xml><?xml version="1.0" encoding="utf-8"?>
+<p:notes xmlns:a="http://schemas.openxmlformats.org/drawingml/2006/main" xmlns:r="http://schemas.openxmlformats.org/officeDocument/2006/relationships" xmlns:mc="http://schemas.openxmlformats.org/markup-compatibility/2006" xmlns:mv="urn:schemas-microsoft-com:mac:vml" xmlns:p="http://schemas.openxmlformats.org/presentationml/2006/main" xmlns:c="http://schemas.openxmlformats.org/drawingml/2006/chart" xmlns:dgm="http://schemas.openxmlformats.org/drawingml/2006/diagram" xmlns:o="urn:schemas-microsoft-com:office:office" xmlns:v="urn:schemas-microsoft-com:vml" xmlns:pvml="urn:schemas-microsoft-com:office:powerpoint" xmlns:com="http://schemas.openxmlformats.org/drawingml/2006/compatibility" xmlns:p14="http://schemas.microsoft.com/office/powerpoint/2010/main" xmlns:p15="http://schemas.microsoft.com/office/powerpoint/2012/main" xmlns:ahyp="http://schemas.microsoft.com/office/drawing/2018/hyperlinkcolor" showMasterPhAnim="0" showMasterSp="0">
+  <p:cSld>
+    <p:spTree>
+      <p:nvGrpSpPr>
+        <p:cNvPr id="490" name="Shape 490"/>
+        <p:cNvGrpSpPr/>
+        <p:nvPr/>
+      </p:nvGrpSpPr>
+      <p:grpSpPr>
+        <a:xfrm>
+          <a:off x="0" y="0"/>
+          <a:ext cx="0" cy="0"/>
+          <a:chOff x="0" y="0"/>
+          <a:chExt cx="0" cy="0"/>
+        </a:xfrm>
+      </p:grpSpPr>
+      <p:sp>
+        <p:nvSpPr>
+          <p:cNvPr id="491" name="Google Shape;491;h4db1e5819fb5c0f_0_44:notes"/>
+          <p:cNvSpPr txBox="1"/>
+          <p:nvPr>
+            <p:ph idx="1" type="body"/>
+          </p:nvPr>
+        </p:nvSpPr>
+        <p:spPr>
+          <a:xfrm>
+            <a:off x="685800" y="4400550"/>
+            <a:ext cx="5486400" cy="3086100"/>
+          </a:xfrm>
+          <a:prstGeom prst="rect">
+            <a:avLst/>
+          </a:prstGeom>
+        </p:spPr>
+        <p:txBody>
+          <a:bodyPr anchorCtr="0" anchor="t" bIns="45700" lIns="91425" spcFirstLastPara="1" rIns="91425" wrap="square" tIns="45700">
+            <a:noAutofit/>
+          </a:bodyPr>
+          <a:lstStyle/>
+          <a:p>
+            <a:pPr indent="0" lvl="0" marL="0" rtl="0" algn="l">
+              <a:spcBef>
+                <a:spcPts val="0"/>
+              </a:spcBef>
+              <a:spcAft>
+                <a:spcPts val="0"/>
+              </a:spcAft>
+              <a:buNone/>
+            </a:pPr>
+            <a:r>
+              <a:t/>
+            </a:r>
+            <a:endParaRPr/>
+          </a:p>
+        </p:txBody>
+      </p:sp>
+      <p:sp>
+        <p:nvSpPr>
+          <p:cNvPr id="492" name="Google Shape;492;h4db1e5819fb5c0f_0_44:notes"/>
+          <p:cNvSpPr/>
+          <p:nvPr>
+            <p:ph idx="2" type="sldImg"/>
+          </p:nvPr>
+        </p:nvSpPr>
+        <p:spPr>
+          <a:xfrm>
+            <a:off x="685800" y="1143000"/>
+            <a:ext cx="5486400" cy="3086100"/>
+          </a:xfrm>
+          <a:custGeom>
+            <a:rect b="b" l="l" r="r" t="t"/>
+            <a:pathLst>
+              <a:path extrusionOk="0" h="120000" w="120000">
+                <a:moveTo>
+                  <a:pt x="0" y="0"/>
+                </a:moveTo>
+                <a:lnTo>
+                  <a:pt x="120000" y="0"/>
+                </a:lnTo>
+                <a:lnTo>
+                  <a:pt x="120000" y="120000"/>
+                </a:lnTo>
+                <a:lnTo>
+                  <a:pt x="0" y="120000"/>
+                </a:lnTo>
+                <a:close/>
+              </a:path>
+            </a:pathLst>
+          </a:custGeom>
+        </p:spPr>
+      </p:sp>
+    </p:spTree>
+  </p:cSld>
+  <p:clrMapOvr>
+    <a:masterClrMapping/>
+  </p:clrMapOvr>
+</p:notes>
+</file>
+
+<file path=ppt/notesSlides/notesSlide9.xml><?xml version="1.0" encoding="utf-8"?>
+<p:notes xmlns:a="http://schemas.openxmlformats.org/drawingml/2006/main" xmlns:r="http://schemas.openxmlformats.org/officeDocument/2006/relationships" xmlns:mc="http://schemas.openxmlformats.org/markup-compatibility/2006" xmlns:mv="urn:schemas-microsoft-com:mac:vml" xmlns:p="http://schemas.openxmlformats.org/presentationml/2006/main" xmlns:c="http://schemas.openxmlformats.org/drawingml/2006/chart" xmlns:dgm="http://schemas.openxmlformats.org/drawingml/2006/diagram" xmlns:o="urn:schemas-microsoft-com:office:office" xmlns:v="urn:schemas-microsoft-com:vml" xmlns:pvml="urn:schemas-microsoft-com:office:powerpoint" xmlns:com="http://schemas.openxmlformats.org/drawingml/2006/compatibility" xmlns:p14="http://schemas.microsoft.com/office/powerpoint/2010/main" xmlns:p15="http://schemas.microsoft.com/office/powerpoint/2012/main" xmlns:ahyp="http://schemas.microsoft.com/office/drawing/2018/hyperlinkcolor" showMasterPhAnim="0" showMasterSp="0">
+  <p:cSld>
+    <p:spTree>
+      <p:nvGrpSpPr>
+        <p:cNvPr id="496" name="Shape 496"/>
+        <p:cNvGrpSpPr/>
+        <p:nvPr/>
+      </p:nvGrpSpPr>
+      <p:grpSpPr>
+        <a:xfrm>
+          <a:off x="0" y="0"/>
+          <a:ext cx="0" cy="0"/>
+          <a:chOff x="0" y="0"/>
+          <a:chExt cx="0" cy="0"/>
+        </a:xfrm>
+      </p:grpSpPr>
+      <p:sp>
+        <p:nvSpPr>
+          <p:cNvPr id="497" name="Google Shape;497;p5:notes"/>
+          <p:cNvSpPr txBox="1"/>
+          <p:nvPr>
+            <p:ph idx="1" type="body"/>
+          </p:nvPr>
+        </p:nvSpPr>
+        <p:spPr>
+          <a:xfrm>
+            <a:off x="685800" y="4400550"/>
+            <a:ext cx="5486400" cy="3086100"/>
+          </a:xfrm>
+          <a:prstGeom prst="rect">
+            <a:avLst/>
+          </a:prstGeom>
+        </p:spPr>
+        <p:txBody>
+          <a:bodyPr anchorCtr="0" anchor="t" bIns="45700" lIns="91425" spcFirstLastPara="1" rIns="91425" wrap="square" tIns="45700">
+            <a:noAutofit/>
+          </a:bodyPr>
+          <a:lstStyle/>
+          <a:p>
+            <a:pPr indent="0" lvl="0" marL="0" rtl="0" algn="l">
+              <a:spcBef>
+                <a:spcPts val="0"/>
+              </a:spcBef>
+              <a:spcAft>
+                <a:spcPts val="0"/>
+              </a:spcAft>
+              <a:buNone/>
+            </a:pPr>
+            <a:r>
+              <a:t/>
+            </a:r>
+            <a:endParaRPr/>
+          </a:p>
+        </p:txBody>
+      </p:sp>
+      <p:sp>
+        <p:nvSpPr>
+          <p:cNvPr id="498" name="Google Shape;498;p5:notes"/>
           <p:cNvSpPr/>
           <p:nvPr>
             <p:ph idx="2" type="sldImg"/>
@@ -21421,6 +21721,2200 @@
         </p:nvSpPr>
         <p:spPr>
           <a:xfrm>
+            <a:off x="63225" y="0"/>
+            <a:ext cx="7403400" cy="567600"/>
+          </a:xfrm>
+          <a:prstGeom prst="rect">
+            <a:avLst/>
+          </a:prstGeom>
+          <a:noFill/>
+          <a:ln>
+            <a:noFill/>
+          </a:ln>
+        </p:spPr>
+        <p:txBody>
+          <a:bodyPr anchorCtr="0" anchor="b" bIns="45700" lIns="91425" spcFirstLastPara="1" rIns="91425" wrap="square" tIns="45700">
+            <a:normAutofit/>
+          </a:bodyPr>
+          <a:lstStyle/>
+          <a:p>
+            <a:pPr indent="0" lvl="0" marL="0" rtl="0" algn="l">
+              <a:lnSpc>
+                <a:spcPct val="90000"/>
+              </a:lnSpc>
+              <a:spcBef>
+                <a:spcPts val="0"/>
+              </a:spcBef>
+              <a:spcAft>
+                <a:spcPts val="0"/>
+              </a:spcAft>
+              <a:buClr>
+                <a:srgbClr val="276E8B"/>
+              </a:buClr>
+              <a:buSzPts val="3200"/>
+              <a:buFont typeface="Arial"/>
+              <a:buNone/>
+            </a:pPr>
+            <a:r>
+              <a:rPr lang="en-US"/>
+              <a:t>Software Framework - block diagram</a:t>
+            </a:r>
+            <a:endParaRPr/>
+          </a:p>
+        </p:txBody>
+      </p:sp>
+      <p:sp>
+        <p:nvSpPr>
+          <p:cNvPr id="448" name="Google Shape;448;p18"/>
+          <p:cNvSpPr/>
+          <p:nvPr/>
+        </p:nvSpPr>
+        <p:spPr>
+          <a:xfrm>
+            <a:off x="1637450" y="1252025"/>
+            <a:ext cx="2180100" cy="624600"/>
+          </a:xfrm>
+          <a:prstGeom prst="rect">
+            <a:avLst/>
+          </a:prstGeom>
+          <a:solidFill>
+            <a:schemeClr val="lt2"/>
+          </a:solidFill>
+          <a:ln cap="flat" cmpd="sng" w="9525">
+            <a:solidFill>
+              <a:schemeClr val="dk2"/>
+            </a:solidFill>
+            <a:prstDash val="solid"/>
+            <a:round/>
+            <a:headEnd len="sm" w="sm" type="none"/>
+            <a:tailEnd len="sm" w="sm" type="none"/>
+          </a:ln>
+        </p:spPr>
+        <p:txBody>
+          <a:bodyPr anchorCtr="0" anchor="ctr" bIns="91425" lIns="91425" spcFirstLastPara="1" rIns="91425" wrap="square" tIns="91425">
+            <a:noAutofit/>
+          </a:bodyPr>
+          <a:lstStyle/>
+          <a:p>
+            <a:pPr indent="0" lvl="0" marL="0" rtl="0" algn="ctr">
+              <a:spcBef>
+                <a:spcPts val="0"/>
+              </a:spcBef>
+              <a:spcAft>
+                <a:spcPts val="0"/>
+              </a:spcAft>
+              <a:buNone/>
+            </a:pPr>
+            <a:r>
+              <a:rPr lang="en-US"/>
+              <a:t>Start Screen</a:t>
+            </a:r>
+            <a:endParaRPr/>
+          </a:p>
+        </p:txBody>
+      </p:sp>
+      <p:sp>
+        <p:nvSpPr>
+          <p:cNvPr id="449" name="Google Shape;449;p18"/>
+          <p:cNvSpPr/>
+          <p:nvPr/>
+        </p:nvSpPr>
+        <p:spPr>
+          <a:xfrm>
+            <a:off x="2922375" y="2337600"/>
+            <a:ext cx="1794000" cy="567600"/>
+          </a:xfrm>
+          <a:prstGeom prst="roundRect">
+            <a:avLst>
+              <a:gd fmla="val 16667" name="adj"/>
+            </a:avLst>
+          </a:prstGeom>
+          <a:solidFill>
+            <a:schemeClr val="accent1"/>
+          </a:solidFill>
+          <a:ln cap="flat" cmpd="sng" w="9525">
+            <a:solidFill>
+              <a:schemeClr val="dk2"/>
+            </a:solidFill>
+            <a:prstDash val="solid"/>
+            <a:round/>
+            <a:headEnd len="sm" w="sm" type="none"/>
+            <a:tailEnd len="sm" w="sm" type="none"/>
+          </a:ln>
+        </p:spPr>
+        <p:txBody>
+          <a:bodyPr anchorCtr="0" anchor="ctr" bIns="91425" lIns="91425" spcFirstLastPara="1" rIns="91425" wrap="square" tIns="91425">
+            <a:noAutofit/>
+          </a:bodyPr>
+          <a:lstStyle/>
+          <a:p>
+            <a:pPr indent="0" lvl="0" marL="0" rtl="0" algn="ctr">
+              <a:spcBef>
+                <a:spcPts val="0"/>
+              </a:spcBef>
+              <a:spcAft>
+                <a:spcPts val="0"/>
+              </a:spcAft>
+              <a:buNone/>
+            </a:pPr>
+            <a:r>
+              <a:rPr lang="en-US"/>
+              <a:t>Green Button (training mode)</a:t>
+            </a:r>
+            <a:endParaRPr/>
+          </a:p>
+        </p:txBody>
+      </p:sp>
+      <p:sp>
+        <p:nvSpPr>
+          <p:cNvPr id="450" name="Google Shape;450;p18"/>
+          <p:cNvSpPr/>
+          <p:nvPr/>
+        </p:nvSpPr>
+        <p:spPr>
+          <a:xfrm>
+            <a:off x="403100" y="2337725"/>
+            <a:ext cx="1794000" cy="567600"/>
+          </a:xfrm>
+          <a:prstGeom prst="roundRect">
+            <a:avLst>
+              <a:gd fmla="val 16667" name="adj"/>
+            </a:avLst>
+          </a:prstGeom>
+          <a:solidFill>
+            <a:schemeClr val="accent1"/>
+          </a:solidFill>
+          <a:ln cap="flat" cmpd="sng" w="9525">
+            <a:solidFill>
+              <a:schemeClr val="dk2"/>
+            </a:solidFill>
+            <a:prstDash val="solid"/>
+            <a:round/>
+            <a:headEnd len="sm" w="sm" type="none"/>
+            <a:tailEnd len="sm" w="sm" type="none"/>
+          </a:ln>
+        </p:spPr>
+        <p:txBody>
+          <a:bodyPr anchorCtr="0" anchor="ctr" bIns="91425" lIns="91425" spcFirstLastPara="1" rIns="91425" wrap="square" tIns="91425">
+            <a:noAutofit/>
+          </a:bodyPr>
+          <a:lstStyle/>
+          <a:p>
+            <a:pPr indent="0" lvl="0" marL="0" rtl="0" algn="ctr">
+              <a:spcBef>
+                <a:spcPts val="0"/>
+              </a:spcBef>
+              <a:spcAft>
+                <a:spcPts val="0"/>
+              </a:spcAft>
+              <a:buNone/>
+            </a:pPr>
+            <a:r>
+              <a:rPr lang="en-US"/>
+              <a:t>Red Button (typing mode)</a:t>
+            </a:r>
+            <a:endParaRPr/>
+          </a:p>
+        </p:txBody>
+      </p:sp>
+      <p:cxnSp>
+        <p:nvCxnSpPr>
+          <p:cNvPr id="451" name="Google Shape;451;p18"/>
+          <p:cNvCxnSpPr>
+            <a:stCxn id="448" idx="2"/>
+            <a:endCxn id="449" idx="0"/>
+          </p:cNvCxnSpPr>
+          <p:nvPr/>
+        </p:nvCxnSpPr>
+        <p:spPr>
+          <a:xfrm>
+            <a:off x="2727500" y="1876625"/>
+            <a:ext cx="1092000" cy="461100"/>
+          </a:xfrm>
+          <a:prstGeom prst="straightConnector1">
+            <a:avLst/>
+          </a:prstGeom>
+          <a:noFill/>
+          <a:ln cap="flat" cmpd="sng" w="9525">
+            <a:solidFill>
+              <a:schemeClr val="dk2"/>
+            </a:solidFill>
+            <a:prstDash val="solid"/>
+            <a:round/>
+            <a:headEnd len="med" w="med" type="none"/>
+            <a:tailEnd len="med" w="med" type="triangle"/>
+          </a:ln>
+        </p:spPr>
+      </p:cxnSp>
+      <p:cxnSp>
+        <p:nvCxnSpPr>
+          <p:cNvPr id="452" name="Google Shape;452;p18"/>
+          <p:cNvCxnSpPr>
+            <a:stCxn id="448" idx="2"/>
+            <a:endCxn id="450" idx="0"/>
+          </p:cNvCxnSpPr>
+          <p:nvPr/>
+        </p:nvCxnSpPr>
+        <p:spPr>
+          <a:xfrm flipH="1">
+            <a:off x="1300100" y="1876625"/>
+            <a:ext cx="1427400" cy="461100"/>
+          </a:xfrm>
+          <a:prstGeom prst="straightConnector1">
+            <a:avLst/>
+          </a:prstGeom>
+          <a:noFill/>
+          <a:ln cap="flat" cmpd="sng" w="9525">
+            <a:solidFill>
+              <a:schemeClr val="dk2"/>
+            </a:solidFill>
+            <a:prstDash val="solid"/>
+            <a:round/>
+            <a:headEnd len="med" w="med" type="none"/>
+            <a:tailEnd len="med" w="med" type="triangle"/>
+          </a:ln>
+        </p:spPr>
+      </p:cxnSp>
+      <p:sp>
+        <p:nvSpPr>
+          <p:cNvPr id="453" name="Google Shape;453;p18"/>
+          <p:cNvSpPr/>
+          <p:nvPr/>
+        </p:nvSpPr>
+        <p:spPr>
+          <a:xfrm>
+            <a:off x="2922375" y="3299950"/>
+            <a:ext cx="1794000" cy="624600"/>
+          </a:xfrm>
+          <a:prstGeom prst="rect">
+            <a:avLst/>
+          </a:prstGeom>
+          <a:solidFill>
+            <a:schemeClr val="lt2"/>
+          </a:solidFill>
+          <a:ln cap="flat" cmpd="sng" w="9525">
+            <a:solidFill>
+              <a:schemeClr val="dk2"/>
+            </a:solidFill>
+            <a:prstDash val="solid"/>
+            <a:round/>
+            <a:headEnd len="sm" w="sm" type="none"/>
+            <a:tailEnd len="sm" w="sm" type="none"/>
+          </a:ln>
+        </p:spPr>
+        <p:txBody>
+          <a:bodyPr anchorCtr="0" anchor="ctr" bIns="91425" lIns="91425" spcFirstLastPara="1" rIns="91425" wrap="square" tIns="91425">
+            <a:noAutofit/>
+          </a:bodyPr>
+          <a:lstStyle/>
+          <a:p>
+            <a:pPr indent="0" lvl="0" marL="0" rtl="0" algn="ctr">
+              <a:spcBef>
+                <a:spcPts val="0"/>
+              </a:spcBef>
+              <a:spcAft>
+                <a:spcPts val="0"/>
+              </a:spcAft>
+              <a:buNone/>
+            </a:pPr>
+            <a:r>
+              <a:rPr lang="en-US"/>
+              <a:t>Instructions / explanation screen</a:t>
+            </a:r>
+            <a:endParaRPr/>
+          </a:p>
+        </p:txBody>
+      </p:sp>
+      <p:cxnSp>
+        <p:nvCxnSpPr>
+          <p:cNvPr id="454" name="Google Shape;454;p18"/>
+          <p:cNvCxnSpPr>
+            <a:stCxn id="449" idx="2"/>
+            <a:endCxn id="453" idx="0"/>
+          </p:cNvCxnSpPr>
+          <p:nvPr/>
+        </p:nvCxnSpPr>
+        <p:spPr>
+          <a:xfrm>
+            <a:off x="3819375" y="2905200"/>
+            <a:ext cx="0" cy="394800"/>
+          </a:xfrm>
+          <a:prstGeom prst="straightConnector1">
+            <a:avLst/>
+          </a:prstGeom>
+          <a:noFill/>
+          <a:ln cap="flat" cmpd="sng" w="9525">
+            <a:solidFill>
+              <a:schemeClr val="dk2"/>
+            </a:solidFill>
+            <a:prstDash val="solid"/>
+            <a:round/>
+            <a:headEnd len="med" w="med" type="none"/>
+            <a:tailEnd len="med" w="med" type="triangle"/>
+          </a:ln>
+        </p:spPr>
+      </p:cxnSp>
+      <p:sp>
+        <p:nvSpPr>
+          <p:cNvPr id="455" name="Google Shape;455;p18"/>
+          <p:cNvSpPr/>
+          <p:nvPr/>
+        </p:nvSpPr>
+        <p:spPr>
+          <a:xfrm>
+            <a:off x="2922375" y="4319300"/>
+            <a:ext cx="1794000" cy="624600"/>
+          </a:xfrm>
+          <a:prstGeom prst="rect">
+            <a:avLst/>
+          </a:prstGeom>
+          <a:solidFill>
+            <a:schemeClr val="lt2"/>
+          </a:solidFill>
+          <a:ln cap="flat" cmpd="sng" w="9525">
+            <a:solidFill>
+              <a:schemeClr val="dk2"/>
+            </a:solidFill>
+            <a:prstDash val="solid"/>
+            <a:round/>
+            <a:headEnd len="sm" w="sm" type="none"/>
+            <a:tailEnd len="sm" w="sm" type="none"/>
+          </a:ln>
+        </p:spPr>
+        <p:txBody>
+          <a:bodyPr anchorCtr="0" anchor="ctr" bIns="91425" lIns="91425" spcFirstLastPara="1" rIns="91425" wrap="square" tIns="91425">
+            <a:noAutofit/>
+          </a:bodyPr>
+          <a:lstStyle/>
+          <a:p>
+            <a:pPr indent="0" lvl="0" marL="0" rtl="0" algn="ctr">
+              <a:spcBef>
+                <a:spcPts val="0"/>
+              </a:spcBef>
+              <a:spcAft>
+                <a:spcPts val="0"/>
+              </a:spcAft>
+              <a:buNone/>
+            </a:pPr>
+            <a:r>
+              <a:rPr lang="en-US"/>
+              <a:t>Trains all letters</a:t>
+            </a:r>
+            <a:endParaRPr/>
+          </a:p>
+        </p:txBody>
+      </p:sp>
+      <p:cxnSp>
+        <p:nvCxnSpPr>
+          <p:cNvPr id="456" name="Google Shape;456;p18"/>
+          <p:cNvCxnSpPr>
+            <a:stCxn id="453" idx="2"/>
+            <a:endCxn id="455" idx="0"/>
+          </p:cNvCxnSpPr>
+          <p:nvPr/>
+        </p:nvCxnSpPr>
+        <p:spPr>
+          <a:xfrm>
+            <a:off x="3819375" y="3924550"/>
+            <a:ext cx="0" cy="394800"/>
+          </a:xfrm>
+          <a:prstGeom prst="straightConnector1">
+            <a:avLst/>
+          </a:prstGeom>
+          <a:noFill/>
+          <a:ln cap="flat" cmpd="sng" w="9525">
+            <a:solidFill>
+              <a:schemeClr val="dk2"/>
+            </a:solidFill>
+            <a:prstDash val="solid"/>
+            <a:round/>
+            <a:headEnd len="med" w="med" type="none"/>
+            <a:tailEnd len="med" w="med" type="triangle"/>
+          </a:ln>
+        </p:spPr>
+      </p:cxnSp>
+      <p:sp>
+        <p:nvSpPr>
+          <p:cNvPr id="457" name="Google Shape;457;p18"/>
+          <p:cNvSpPr/>
+          <p:nvPr/>
+        </p:nvSpPr>
+        <p:spPr>
+          <a:xfrm>
+            <a:off x="2922375" y="5290800"/>
+            <a:ext cx="1794000" cy="624600"/>
+          </a:xfrm>
+          <a:prstGeom prst="rect">
+            <a:avLst/>
+          </a:prstGeom>
+          <a:solidFill>
+            <a:schemeClr val="lt2"/>
+          </a:solidFill>
+          <a:ln cap="flat" cmpd="sng" w="9525">
+            <a:solidFill>
+              <a:schemeClr val="dk2"/>
+            </a:solidFill>
+            <a:prstDash val="solid"/>
+            <a:round/>
+            <a:headEnd len="sm" w="sm" type="none"/>
+            <a:tailEnd len="sm" w="sm" type="none"/>
+          </a:ln>
+        </p:spPr>
+        <p:txBody>
+          <a:bodyPr anchorCtr="0" anchor="ctr" bIns="91425" lIns="91425" spcFirstLastPara="1" rIns="91425" wrap="square" tIns="91425">
+            <a:noAutofit/>
+          </a:bodyPr>
+          <a:lstStyle/>
+          <a:p>
+            <a:pPr indent="0" lvl="0" marL="0" rtl="0" algn="ctr">
+              <a:spcBef>
+                <a:spcPts val="0"/>
+              </a:spcBef>
+              <a:spcAft>
+                <a:spcPts val="0"/>
+              </a:spcAft>
+              <a:buNone/>
+            </a:pPr>
+            <a:r>
+              <a:rPr lang="en-US"/>
+              <a:t>Congrats screen</a:t>
+            </a:r>
+            <a:endParaRPr/>
+          </a:p>
+        </p:txBody>
+      </p:sp>
+      <p:cxnSp>
+        <p:nvCxnSpPr>
+          <p:cNvPr id="458" name="Google Shape;458;p18"/>
+          <p:cNvCxnSpPr>
+            <a:stCxn id="455" idx="2"/>
+            <a:endCxn id="457" idx="0"/>
+          </p:cNvCxnSpPr>
+          <p:nvPr/>
+        </p:nvCxnSpPr>
+        <p:spPr>
+          <a:xfrm>
+            <a:off x="3819375" y="4943900"/>
+            <a:ext cx="0" cy="346800"/>
+          </a:xfrm>
+          <a:prstGeom prst="straightConnector1">
+            <a:avLst/>
+          </a:prstGeom>
+          <a:noFill/>
+          <a:ln cap="flat" cmpd="sng" w="9525">
+            <a:solidFill>
+              <a:schemeClr val="dk2"/>
+            </a:solidFill>
+            <a:prstDash val="solid"/>
+            <a:round/>
+            <a:headEnd len="med" w="med" type="none"/>
+            <a:tailEnd len="med" w="med" type="triangle"/>
+          </a:ln>
+        </p:spPr>
+      </p:cxnSp>
+      <p:cxnSp>
+        <p:nvCxnSpPr>
+          <p:cNvPr id="459" name="Google Shape;459;p18"/>
+          <p:cNvCxnSpPr>
+            <a:stCxn id="457" idx="3"/>
+            <a:endCxn id="448" idx="3"/>
+          </p:cNvCxnSpPr>
+          <p:nvPr/>
+        </p:nvCxnSpPr>
+        <p:spPr>
+          <a:xfrm rot="10800000">
+            <a:off x="3817575" y="1564200"/>
+            <a:ext cx="898800" cy="4038900"/>
+          </a:xfrm>
+          <a:prstGeom prst="bentConnector3">
+            <a:avLst>
+              <a:gd fmla="val -58105" name="adj1"/>
+            </a:avLst>
+          </a:prstGeom>
+          <a:noFill/>
+          <a:ln cap="flat" cmpd="sng" w="9525">
+            <a:solidFill>
+              <a:schemeClr val="dk2"/>
+            </a:solidFill>
+            <a:prstDash val="solid"/>
+            <a:round/>
+            <a:headEnd len="med" w="med" type="none"/>
+            <a:tailEnd len="med" w="med" type="stealth"/>
+          </a:ln>
+        </p:spPr>
+      </p:cxnSp>
+      <p:sp>
+        <p:nvSpPr>
+          <p:cNvPr id="460" name="Google Shape;460;p18"/>
+          <p:cNvSpPr/>
+          <p:nvPr/>
+        </p:nvSpPr>
+        <p:spPr>
+          <a:xfrm>
+            <a:off x="7854575" y="358000"/>
+            <a:ext cx="2477400" cy="624600"/>
+          </a:xfrm>
+          <a:prstGeom prst="rect">
+            <a:avLst/>
+          </a:prstGeom>
+          <a:solidFill>
+            <a:schemeClr val="lt2"/>
+          </a:solidFill>
+          <a:ln cap="flat" cmpd="sng" w="9525">
+            <a:solidFill>
+              <a:schemeClr val="dk2"/>
+            </a:solidFill>
+            <a:prstDash val="solid"/>
+            <a:round/>
+            <a:headEnd len="sm" w="sm" type="none"/>
+            <a:tailEnd len="sm" w="sm" type="none"/>
+          </a:ln>
+        </p:spPr>
+        <p:txBody>
+          <a:bodyPr anchorCtr="0" anchor="ctr" bIns="91425" lIns="91425" spcFirstLastPara="1" rIns="91425" wrap="square" tIns="91425">
+            <a:noAutofit/>
+          </a:bodyPr>
+          <a:lstStyle/>
+          <a:p>
+            <a:pPr indent="0" lvl="0" marL="0" rtl="0" algn="ctr">
+              <a:spcBef>
+                <a:spcPts val="0"/>
+              </a:spcBef>
+              <a:spcAft>
+                <a:spcPts val="0"/>
+              </a:spcAft>
+              <a:buNone/>
+            </a:pPr>
+            <a:r>
+              <a:rPr lang="en-US" sz="1200"/>
+              <a:t>Displays graphic for letter (from chart) on screen, flashes on LED and buzzes 2x</a:t>
+            </a:r>
+            <a:endParaRPr sz="1200"/>
+          </a:p>
+        </p:txBody>
+      </p:sp>
+      <p:cxnSp>
+        <p:nvCxnSpPr>
+          <p:cNvPr id="461" name="Google Shape;461;p18"/>
+          <p:cNvCxnSpPr>
+            <a:stCxn id="460" idx="2"/>
+            <a:endCxn id="462" idx="0"/>
+          </p:cNvCxnSpPr>
+          <p:nvPr/>
+        </p:nvCxnSpPr>
+        <p:spPr>
+          <a:xfrm>
+            <a:off x="9093275" y="982600"/>
+            <a:ext cx="0" cy="358800"/>
+          </a:xfrm>
+          <a:prstGeom prst="straightConnector1">
+            <a:avLst/>
+          </a:prstGeom>
+          <a:noFill/>
+          <a:ln cap="flat" cmpd="sng" w="9525">
+            <a:solidFill>
+              <a:schemeClr val="dk2"/>
+            </a:solidFill>
+            <a:prstDash val="solid"/>
+            <a:round/>
+            <a:headEnd len="med" w="med" type="none"/>
+            <a:tailEnd len="med" w="med" type="triangle"/>
+          </a:ln>
+        </p:spPr>
+      </p:cxnSp>
+      <p:sp>
+        <p:nvSpPr>
+          <p:cNvPr id="462" name="Google Shape;462;p18"/>
+          <p:cNvSpPr/>
+          <p:nvPr/>
+        </p:nvSpPr>
+        <p:spPr>
+          <a:xfrm>
+            <a:off x="8196200" y="1341275"/>
+            <a:ext cx="1794000" cy="624600"/>
+          </a:xfrm>
+          <a:prstGeom prst="rect">
+            <a:avLst/>
+          </a:prstGeom>
+          <a:solidFill>
+            <a:schemeClr val="lt2"/>
+          </a:solidFill>
+          <a:ln cap="flat" cmpd="sng" w="9525">
+            <a:solidFill>
+              <a:schemeClr val="dk2"/>
+            </a:solidFill>
+            <a:prstDash val="solid"/>
+            <a:round/>
+            <a:headEnd len="sm" w="sm" type="none"/>
+            <a:tailEnd len="sm" w="sm" type="none"/>
+          </a:ln>
+        </p:spPr>
+        <p:txBody>
+          <a:bodyPr anchorCtr="0" anchor="ctr" bIns="91425" lIns="91425" spcFirstLastPara="1" rIns="91425" wrap="square" tIns="91425">
+            <a:noAutofit/>
+          </a:bodyPr>
+          <a:lstStyle/>
+          <a:p>
+            <a:pPr indent="0" lvl="0" marL="0" rtl="0" algn="ctr">
+              <a:spcBef>
+                <a:spcPts val="0"/>
+              </a:spcBef>
+              <a:spcAft>
+                <a:spcPts val="0"/>
+              </a:spcAft>
+              <a:buNone/>
+            </a:pPr>
+            <a:r>
+              <a:rPr lang="en-US"/>
+              <a:t>Prompts user input on screen</a:t>
+            </a:r>
+            <a:endParaRPr/>
+          </a:p>
+        </p:txBody>
+      </p:sp>
+      <p:sp>
+        <p:nvSpPr>
+          <p:cNvPr id="463" name="Google Shape;463;p18"/>
+          <p:cNvSpPr/>
+          <p:nvPr/>
+        </p:nvSpPr>
+        <p:spPr>
+          <a:xfrm>
+            <a:off x="8196200" y="2324550"/>
+            <a:ext cx="1794000" cy="567600"/>
+          </a:xfrm>
+          <a:prstGeom prst="roundRect">
+            <a:avLst>
+              <a:gd fmla="val 16667" name="adj"/>
+            </a:avLst>
+          </a:prstGeom>
+          <a:solidFill>
+            <a:schemeClr val="accent1"/>
+          </a:solidFill>
+          <a:ln cap="flat" cmpd="sng" w="9525">
+            <a:solidFill>
+              <a:schemeClr val="dk2"/>
+            </a:solidFill>
+            <a:prstDash val="solid"/>
+            <a:round/>
+            <a:headEnd len="sm" w="sm" type="none"/>
+            <a:tailEnd len="sm" w="sm" type="none"/>
+          </a:ln>
+        </p:spPr>
+        <p:txBody>
+          <a:bodyPr anchorCtr="0" anchor="ctr" bIns="91425" lIns="91425" spcFirstLastPara="1" rIns="91425" wrap="square" tIns="91425">
+            <a:noAutofit/>
+          </a:bodyPr>
+          <a:lstStyle/>
+          <a:p>
+            <a:pPr indent="0" lvl="0" marL="0" rtl="0" algn="ctr">
+              <a:spcBef>
+                <a:spcPts val="0"/>
+              </a:spcBef>
+              <a:spcAft>
+                <a:spcPts val="0"/>
+              </a:spcAft>
+              <a:buNone/>
+            </a:pPr>
+            <a:r>
+              <a:rPr lang="en-US" sz="1200"/>
+              <a:t>User inputs letter with blue button. LED and buzzer match input</a:t>
+            </a:r>
+            <a:endParaRPr sz="1200"/>
+          </a:p>
+        </p:txBody>
+      </p:sp>
+      <p:sp>
+        <p:nvSpPr>
+          <p:cNvPr id="464" name="Google Shape;464;p18"/>
+          <p:cNvSpPr/>
+          <p:nvPr/>
+        </p:nvSpPr>
+        <p:spPr>
+          <a:xfrm>
+            <a:off x="8196200" y="3250825"/>
+            <a:ext cx="1794000" cy="624600"/>
+          </a:xfrm>
+          <a:prstGeom prst="rect">
+            <a:avLst/>
+          </a:prstGeom>
+          <a:solidFill>
+            <a:schemeClr val="lt2"/>
+          </a:solidFill>
+          <a:ln cap="flat" cmpd="sng" w="9525">
+            <a:solidFill>
+              <a:schemeClr val="dk2"/>
+            </a:solidFill>
+            <a:prstDash val="solid"/>
+            <a:round/>
+            <a:headEnd len="sm" w="sm" type="none"/>
+            <a:tailEnd len="sm" w="sm" type="none"/>
+          </a:ln>
+        </p:spPr>
+        <p:txBody>
+          <a:bodyPr anchorCtr="0" anchor="ctr" bIns="91425" lIns="91425" spcFirstLastPara="1" rIns="91425" wrap="square" tIns="91425">
+            <a:noAutofit/>
+          </a:bodyPr>
+          <a:lstStyle/>
+          <a:p>
+            <a:pPr indent="0" lvl="0" marL="0" rtl="0" algn="ctr">
+              <a:spcBef>
+                <a:spcPts val="0"/>
+              </a:spcBef>
+              <a:spcAft>
+                <a:spcPts val="0"/>
+              </a:spcAft>
+              <a:buNone/>
+            </a:pPr>
+            <a:r>
+              <a:rPr lang="en-US"/>
+              <a:t>Check letter match</a:t>
+            </a:r>
+            <a:endParaRPr/>
+          </a:p>
+        </p:txBody>
+      </p:sp>
+      <p:sp>
+        <p:nvSpPr>
+          <p:cNvPr id="465" name="Google Shape;465;p18"/>
+          <p:cNvSpPr/>
+          <p:nvPr/>
+        </p:nvSpPr>
+        <p:spPr>
+          <a:xfrm>
+            <a:off x="7466625" y="4631600"/>
+            <a:ext cx="1794000" cy="624600"/>
+          </a:xfrm>
+          <a:prstGeom prst="rect">
+            <a:avLst/>
+          </a:prstGeom>
+          <a:solidFill>
+            <a:schemeClr val="lt2"/>
+          </a:solidFill>
+          <a:ln cap="flat" cmpd="sng" w="9525">
+            <a:solidFill>
+              <a:schemeClr val="dk2"/>
+            </a:solidFill>
+            <a:prstDash val="solid"/>
+            <a:round/>
+            <a:headEnd len="sm" w="sm" type="none"/>
+            <a:tailEnd len="sm" w="sm" type="none"/>
+          </a:ln>
+        </p:spPr>
+        <p:txBody>
+          <a:bodyPr anchorCtr="0" anchor="ctr" bIns="91425" lIns="91425" spcFirstLastPara="1" rIns="91425" wrap="square" tIns="91425">
+            <a:noAutofit/>
+          </a:bodyPr>
+          <a:lstStyle/>
+          <a:p>
+            <a:pPr indent="0" lvl="0" marL="0" rtl="0" algn="ctr">
+              <a:spcBef>
+                <a:spcPts val="0"/>
+              </a:spcBef>
+              <a:spcAft>
+                <a:spcPts val="0"/>
+              </a:spcAft>
+              <a:buNone/>
+            </a:pPr>
+            <a:r>
+              <a:rPr lang="en-US"/>
+              <a:t>Display “try again” message, restart</a:t>
+            </a:r>
+            <a:endParaRPr/>
+          </a:p>
+        </p:txBody>
+      </p:sp>
+      <p:cxnSp>
+        <p:nvCxnSpPr>
+          <p:cNvPr id="466" name="Google Shape;466;p18"/>
+          <p:cNvCxnSpPr>
+            <a:stCxn id="462" idx="2"/>
+            <a:endCxn id="463" idx="0"/>
+          </p:cNvCxnSpPr>
+          <p:nvPr/>
+        </p:nvCxnSpPr>
+        <p:spPr>
+          <a:xfrm>
+            <a:off x="9093200" y="1965875"/>
+            <a:ext cx="0" cy="358800"/>
+          </a:xfrm>
+          <a:prstGeom prst="straightConnector1">
+            <a:avLst/>
+          </a:prstGeom>
+          <a:noFill/>
+          <a:ln cap="flat" cmpd="sng" w="9525">
+            <a:solidFill>
+              <a:schemeClr val="dk2"/>
+            </a:solidFill>
+            <a:prstDash val="solid"/>
+            <a:round/>
+            <a:headEnd len="med" w="med" type="none"/>
+            <a:tailEnd len="med" w="med" type="triangle"/>
+          </a:ln>
+        </p:spPr>
+      </p:cxnSp>
+      <p:cxnSp>
+        <p:nvCxnSpPr>
+          <p:cNvPr id="467" name="Google Shape;467;p18"/>
+          <p:cNvCxnSpPr>
+            <a:stCxn id="463" idx="2"/>
+            <a:endCxn id="464" idx="0"/>
+          </p:cNvCxnSpPr>
+          <p:nvPr/>
+        </p:nvCxnSpPr>
+        <p:spPr>
+          <a:xfrm>
+            <a:off x="9093200" y="2892150"/>
+            <a:ext cx="0" cy="358800"/>
+          </a:xfrm>
+          <a:prstGeom prst="straightConnector1">
+            <a:avLst/>
+          </a:prstGeom>
+          <a:noFill/>
+          <a:ln cap="flat" cmpd="sng" w="9525">
+            <a:solidFill>
+              <a:schemeClr val="dk2"/>
+            </a:solidFill>
+            <a:prstDash val="solid"/>
+            <a:round/>
+            <a:headEnd len="med" w="med" type="none"/>
+            <a:tailEnd len="med" w="med" type="triangle"/>
+          </a:ln>
+        </p:spPr>
+      </p:cxnSp>
+      <p:cxnSp>
+        <p:nvCxnSpPr>
+          <p:cNvPr id="468" name="Google Shape;468;p18"/>
+          <p:cNvCxnSpPr>
+            <a:stCxn id="464" idx="2"/>
+            <a:endCxn id="465" idx="0"/>
+          </p:cNvCxnSpPr>
+          <p:nvPr/>
+        </p:nvCxnSpPr>
+        <p:spPr>
+          <a:xfrm flipH="1">
+            <a:off x="8363600" y="3875425"/>
+            <a:ext cx="729600" cy="756300"/>
+          </a:xfrm>
+          <a:prstGeom prst="straightConnector1">
+            <a:avLst/>
+          </a:prstGeom>
+          <a:noFill/>
+          <a:ln cap="flat" cmpd="sng" w="9525">
+            <a:solidFill>
+              <a:schemeClr val="dk2"/>
+            </a:solidFill>
+            <a:prstDash val="solid"/>
+            <a:round/>
+            <a:headEnd len="med" w="med" type="none"/>
+            <a:tailEnd len="med" w="med" type="triangle"/>
+          </a:ln>
+        </p:spPr>
+      </p:cxnSp>
+      <p:sp>
+        <p:nvSpPr>
+          <p:cNvPr id="469" name="Google Shape;469;p18"/>
+          <p:cNvSpPr txBox="1"/>
+          <p:nvPr/>
+        </p:nvSpPr>
+        <p:spPr>
+          <a:xfrm>
+            <a:off x="7466625" y="3965950"/>
+            <a:ext cx="1284900" cy="400200"/>
+          </a:xfrm>
+          <a:prstGeom prst="rect">
+            <a:avLst/>
+          </a:prstGeom>
+          <a:noFill/>
+          <a:ln>
+            <a:noFill/>
+          </a:ln>
+        </p:spPr>
+        <p:txBody>
+          <a:bodyPr anchorCtr="0" anchor="t" bIns="91425" lIns="91425" spcFirstLastPara="1" rIns="91425" wrap="square" tIns="91425">
+            <a:spAutoFit/>
+          </a:bodyPr>
+          <a:lstStyle/>
+          <a:p>
+            <a:pPr indent="0" lvl="0" marL="0" rtl="0" algn="l">
+              <a:spcBef>
+                <a:spcPts val="0"/>
+              </a:spcBef>
+              <a:spcAft>
+                <a:spcPts val="0"/>
+              </a:spcAft>
+              <a:buNone/>
+            </a:pPr>
+            <a:r>
+              <a:rPr lang="en-US">
+                <a:solidFill>
+                  <a:schemeClr val="dk1"/>
+                </a:solidFill>
+              </a:rPr>
+              <a:t>Match = false</a:t>
+            </a:r>
+            <a:endParaRPr>
+              <a:solidFill>
+                <a:schemeClr val="dk1"/>
+              </a:solidFill>
+            </a:endParaRPr>
+          </a:p>
+        </p:txBody>
+      </p:sp>
+      <p:cxnSp>
+        <p:nvCxnSpPr>
+          <p:cNvPr id="470" name="Google Shape;470;p18"/>
+          <p:cNvCxnSpPr>
+            <a:stCxn id="465" idx="1"/>
+            <a:endCxn id="460" idx="1"/>
+          </p:cNvCxnSpPr>
+          <p:nvPr/>
+        </p:nvCxnSpPr>
+        <p:spPr>
+          <a:xfrm flipH="1" rot="10800000">
+            <a:off x="7466625" y="670400"/>
+            <a:ext cx="387900" cy="4273500"/>
+          </a:xfrm>
+          <a:prstGeom prst="bentConnector3">
+            <a:avLst>
+              <a:gd fmla="val -61388" name="adj1"/>
+            </a:avLst>
+          </a:prstGeom>
+          <a:noFill/>
+          <a:ln cap="flat" cmpd="sng" w="9525">
+            <a:solidFill>
+              <a:schemeClr val="dk2"/>
+            </a:solidFill>
+            <a:prstDash val="solid"/>
+            <a:round/>
+            <a:headEnd len="med" w="med" type="none"/>
+            <a:tailEnd len="med" w="med" type="stealth"/>
+          </a:ln>
+        </p:spPr>
+      </p:cxnSp>
+      <p:sp>
+        <p:nvSpPr>
+          <p:cNvPr id="471" name="Google Shape;471;p18"/>
+          <p:cNvSpPr txBox="1"/>
+          <p:nvPr/>
+        </p:nvSpPr>
+        <p:spPr>
+          <a:xfrm>
+            <a:off x="9990300" y="3965950"/>
+            <a:ext cx="1284900" cy="400200"/>
+          </a:xfrm>
+          <a:prstGeom prst="rect">
+            <a:avLst/>
+          </a:prstGeom>
+          <a:noFill/>
+          <a:ln>
+            <a:noFill/>
+          </a:ln>
+        </p:spPr>
+        <p:txBody>
+          <a:bodyPr anchorCtr="0" anchor="t" bIns="91425" lIns="91425" spcFirstLastPara="1" rIns="91425" wrap="square" tIns="91425">
+            <a:spAutoFit/>
+          </a:bodyPr>
+          <a:lstStyle/>
+          <a:p>
+            <a:pPr indent="0" lvl="0" marL="0" rtl="0" algn="l">
+              <a:spcBef>
+                <a:spcPts val="0"/>
+              </a:spcBef>
+              <a:spcAft>
+                <a:spcPts val="0"/>
+              </a:spcAft>
+              <a:buNone/>
+            </a:pPr>
+            <a:r>
+              <a:rPr lang="en-US">
+                <a:solidFill>
+                  <a:schemeClr val="dk1"/>
+                </a:solidFill>
+              </a:rPr>
+              <a:t>Match = true</a:t>
+            </a:r>
+            <a:endParaRPr>
+              <a:solidFill>
+                <a:schemeClr val="dk1"/>
+              </a:solidFill>
+            </a:endParaRPr>
+          </a:p>
+        </p:txBody>
+      </p:sp>
+      <p:sp>
+        <p:nvSpPr>
+          <p:cNvPr id="472" name="Google Shape;472;p18"/>
+          <p:cNvSpPr/>
+          <p:nvPr/>
+        </p:nvSpPr>
+        <p:spPr>
+          <a:xfrm>
+            <a:off x="9543900" y="4631575"/>
+            <a:ext cx="1794000" cy="624600"/>
+          </a:xfrm>
+          <a:prstGeom prst="rect">
+            <a:avLst/>
+          </a:prstGeom>
+          <a:solidFill>
+            <a:schemeClr val="lt2"/>
+          </a:solidFill>
+          <a:ln cap="flat" cmpd="sng" w="9525">
+            <a:solidFill>
+              <a:schemeClr val="dk2"/>
+            </a:solidFill>
+            <a:prstDash val="solid"/>
+            <a:round/>
+            <a:headEnd len="sm" w="sm" type="none"/>
+            <a:tailEnd len="sm" w="sm" type="none"/>
+          </a:ln>
+        </p:spPr>
+        <p:txBody>
+          <a:bodyPr anchorCtr="0" anchor="ctr" bIns="91425" lIns="91425" spcFirstLastPara="1" rIns="91425" wrap="square" tIns="91425">
+            <a:noAutofit/>
+          </a:bodyPr>
+          <a:lstStyle/>
+          <a:p>
+            <a:pPr indent="0" lvl="0" marL="0" rtl="0" algn="ctr">
+              <a:spcBef>
+                <a:spcPts val="0"/>
+              </a:spcBef>
+              <a:spcAft>
+                <a:spcPts val="0"/>
+              </a:spcAft>
+              <a:buNone/>
+            </a:pPr>
+            <a:r>
+              <a:rPr lang="en-US"/>
+              <a:t>Display “nice job” message, goes to next letter</a:t>
+            </a:r>
+            <a:endParaRPr/>
+          </a:p>
+        </p:txBody>
+      </p:sp>
+      <p:cxnSp>
+        <p:nvCxnSpPr>
+          <p:cNvPr id="473" name="Google Shape;473;p18"/>
+          <p:cNvCxnSpPr>
+            <a:stCxn id="472" idx="3"/>
+            <a:endCxn id="460" idx="3"/>
+          </p:cNvCxnSpPr>
+          <p:nvPr/>
+        </p:nvCxnSpPr>
+        <p:spPr>
+          <a:xfrm rot="10800000">
+            <a:off x="10332000" y="670375"/>
+            <a:ext cx="1005900" cy="4273500"/>
+          </a:xfrm>
+          <a:prstGeom prst="bentConnector3">
+            <a:avLst>
+              <a:gd fmla="val -23673" name="adj1"/>
+            </a:avLst>
+          </a:prstGeom>
+          <a:noFill/>
+          <a:ln cap="flat" cmpd="sng" w="9525">
+            <a:solidFill>
+              <a:schemeClr val="dk2"/>
+            </a:solidFill>
+            <a:prstDash val="solid"/>
+            <a:round/>
+            <a:headEnd len="med" w="med" type="none"/>
+            <a:tailEnd len="med" w="med" type="stealth"/>
+          </a:ln>
+        </p:spPr>
+      </p:cxnSp>
+      <p:cxnSp>
+        <p:nvCxnSpPr>
+          <p:cNvPr id="474" name="Google Shape;474;p18"/>
+          <p:cNvCxnSpPr>
+            <a:stCxn id="464" idx="2"/>
+            <a:endCxn id="472" idx="0"/>
+          </p:cNvCxnSpPr>
+          <p:nvPr/>
+        </p:nvCxnSpPr>
+        <p:spPr>
+          <a:xfrm>
+            <a:off x="9093200" y="3875425"/>
+            <a:ext cx="1347600" cy="756300"/>
+          </a:xfrm>
+          <a:prstGeom prst="straightConnector1">
+            <a:avLst/>
+          </a:prstGeom>
+          <a:noFill/>
+          <a:ln cap="flat" cmpd="sng" w="9525">
+            <a:solidFill>
+              <a:schemeClr val="dk2"/>
+            </a:solidFill>
+            <a:prstDash val="solid"/>
+            <a:round/>
+            <a:headEnd len="med" w="med" type="none"/>
+            <a:tailEnd len="med" w="med" type="triangle"/>
+          </a:ln>
+        </p:spPr>
+      </p:cxnSp>
+      <p:sp>
+        <p:nvSpPr>
+          <p:cNvPr id="475" name="Google Shape;475;p18"/>
+          <p:cNvSpPr/>
+          <p:nvPr/>
+        </p:nvSpPr>
+        <p:spPr>
+          <a:xfrm>
+            <a:off x="403100" y="3299950"/>
+            <a:ext cx="1794000" cy="624600"/>
+          </a:xfrm>
+          <a:prstGeom prst="rect">
+            <a:avLst/>
+          </a:prstGeom>
+          <a:solidFill>
+            <a:schemeClr val="lt2"/>
+          </a:solidFill>
+          <a:ln cap="flat" cmpd="sng" w="9525">
+            <a:solidFill>
+              <a:schemeClr val="dk2"/>
+            </a:solidFill>
+            <a:prstDash val="solid"/>
+            <a:round/>
+            <a:headEnd len="sm" w="sm" type="none"/>
+            <a:tailEnd len="sm" w="sm" type="none"/>
+          </a:ln>
+        </p:spPr>
+        <p:txBody>
+          <a:bodyPr anchorCtr="0" anchor="ctr" bIns="91425" lIns="91425" spcFirstLastPara="1" rIns="91425" wrap="square" tIns="91425">
+            <a:noAutofit/>
+          </a:bodyPr>
+          <a:lstStyle/>
+          <a:p>
+            <a:pPr indent="0" lvl="0" marL="0" rtl="0" algn="ctr">
+              <a:spcBef>
+                <a:spcPts val="0"/>
+              </a:spcBef>
+              <a:spcAft>
+                <a:spcPts val="0"/>
+              </a:spcAft>
+              <a:buNone/>
+            </a:pPr>
+            <a:r>
+              <a:rPr lang="en-US"/>
+              <a:t>Instructions / explanation screen</a:t>
+            </a:r>
+            <a:endParaRPr/>
+          </a:p>
+        </p:txBody>
+      </p:sp>
+      <p:sp>
+        <p:nvSpPr>
+          <p:cNvPr id="476" name="Google Shape;476;p18"/>
+          <p:cNvSpPr/>
+          <p:nvPr/>
+        </p:nvSpPr>
+        <p:spPr>
+          <a:xfrm>
+            <a:off x="258175" y="4256800"/>
+            <a:ext cx="2083800" cy="808200"/>
+          </a:xfrm>
+          <a:prstGeom prst="roundRect">
+            <a:avLst>
+              <a:gd fmla="val 16667" name="adj"/>
+            </a:avLst>
+          </a:prstGeom>
+          <a:solidFill>
+            <a:schemeClr val="accent1"/>
+          </a:solidFill>
+          <a:ln cap="flat" cmpd="sng" w="9525">
+            <a:solidFill>
+              <a:schemeClr val="dk2"/>
+            </a:solidFill>
+            <a:prstDash val="solid"/>
+            <a:round/>
+            <a:headEnd len="sm" w="sm" type="none"/>
+            <a:tailEnd len="sm" w="sm" type="none"/>
+          </a:ln>
+        </p:spPr>
+        <p:txBody>
+          <a:bodyPr anchorCtr="0" anchor="ctr" bIns="91425" lIns="91425" spcFirstLastPara="1" rIns="91425" wrap="square" tIns="91425">
+            <a:noAutofit/>
+          </a:bodyPr>
+          <a:lstStyle/>
+          <a:p>
+            <a:pPr indent="0" lvl="0" marL="0" rtl="0" algn="ctr">
+              <a:spcBef>
+                <a:spcPts val="0"/>
+              </a:spcBef>
+              <a:spcAft>
+                <a:spcPts val="0"/>
+              </a:spcAft>
+              <a:buNone/>
+            </a:pPr>
+            <a:r>
+              <a:rPr lang="en-US" sz="1200"/>
+              <a:t>User inputs </a:t>
+            </a:r>
+            <a:r>
+              <a:rPr lang="en-US" sz="1200"/>
+              <a:t>with</a:t>
+            </a:r>
+            <a:r>
+              <a:rPr lang="en-US" sz="1200"/>
+              <a:t> blue button, deletes </a:t>
+            </a:r>
+            <a:r>
+              <a:rPr lang="en-US" sz="1200"/>
+              <a:t>with</a:t>
+            </a:r>
+            <a:r>
+              <a:rPr lang="en-US" sz="1200"/>
+              <a:t> red, completes </a:t>
+            </a:r>
+            <a:r>
+              <a:rPr lang="en-US" sz="1200"/>
+              <a:t>with</a:t>
+            </a:r>
+            <a:r>
+              <a:rPr lang="en-US" sz="1200"/>
+              <a:t> green. LED and buzzer match input</a:t>
+            </a:r>
+            <a:endParaRPr sz="1200"/>
+          </a:p>
+        </p:txBody>
+      </p:sp>
+      <p:sp>
+        <p:nvSpPr>
+          <p:cNvPr id="477" name="Google Shape;477;p18"/>
+          <p:cNvSpPr/>
+          <p:nvPr/>
+        </p:nvSpPr>
+        <p:spPr>
+          <a:xfrm>
+            <a:off x="403100" y="5290800"/>
+            <a:ext cx="1794000" cy="624600"/>
+          </a:xfrm>
+          <a:prstGeom prst="rect">
+            <a:avLst/>
+          </a:prstGeom>
+          <a:solidFill>
+            <a:schemeClr val="lt2"/>
+          </a:solidFill>
+          <a:ln cap="flat" cmpd="sng" w="9525">
+            <a:solidFill>
+              <a:schemeClr val="dk2"/>
+            </a:solidFill>
+            <a:prstDash val="solid"/>
+            <a:round/>
+            <a:headEnd len="sm" w="sm" type="none"/>
+            <a:tailEnd len="sm" w="sm" type="none"/>
+          </a:ln>
+        </p:spPr>
+        <p:txBody>
+          <a:bodyPr anchorCtr="0" anchor="ctr" bIns="91425" lIns="91425" spcFirstLastPara="1" rIns="91425" wrap="square" tIns="91425">
+            <a:noAutofit/>
+          </a:bodyPr>
+          <a:lstStyle/>
+          <a:p>
+            <a:pPr indent="0" lvl="0" marL="0" rtl="0" algn="ctr">
+              <a:spcBef>
+                <a:spcPts val="0"/>
+              </a:spcBef>
+              <a:spcAft>
+                <a:spcPts val="0"/>
+              </a:spcAft>
+              <a:buNone/>
+            </a:pPr>
+            <a:r>
+              <a:rPr lang="en-US"/>
+              <a:t>Message displayed</a:t>
+            </a:r>
+            <a:endParaRPr/>
+          </a:p>
+        </p:txBody>
+      </p:sp>
+      <p:cxnSp>
+        <p:nvCxnSpPr>
+          <p:cNvPr id="478" name="Google Shape;478;p18"/>
+          <p:cNvCxnSpPr>
+            <a:stCxn id="450" idx="2"/>
+            <a:endCxn id="475" idx="0"/>
+          </p:cNvCxnSpPr>
+          <p:nvPr/>
+        </p:nvCxnSpPr>
+        <p:spPr>
+          <a:xfrm>
+            <a:off x="1300100" y="2905325"/>
+            <a:ext cx="0" cy="394500"/>
+          </a:xfrm>
+          <a:prstGeom prst="straightConnector1">
+            <a:avLst/>
+          </a:prstGeom>
+          <a:noFill/>
+          <a:ln cap="flat" cmpd="sng" w="9525">
+            <a:solidFill>
+              <a:schemeClr val="dk2"/>
+            </a:solidFill>
+            <a:prstDash val="solid"/>
+            <a:round/>
+            <a:headEnd len="med" w="med" type="none"/>
+            <a:tailEnd len="med" w="med" type="triangle"/>
+          </a:ln>
+        </p:spPr>
+      </p:cxnSp>
+      <p:cxnSp>
+        <p:nvCxnSpPr>
+          <p:cNvPr id="479" name="Google Shape;479;p18"/>
+          <p:cNvCxnSpPr>
+            <a:stCxn id="475" idx="2"/>
+            <a:endCxn id="476" idx="0"/>
+          </p:cNvCxnSpPr>
+          <p:nvPr/>
+        </p:nvCxnSpPr>
+        <p:spPr>
+          <a:xfrm>
+            <a:off x="1300100" y="3924550"/>
+            <a:ext cx="0" cy="332400"/>
+          </a:xfrm>
+          <a:prstGeom prst="straightConnector1">
+            <a:avLst/>
+          </a:prstGeom>
+          <a:noFill/>
+          <a:ln cap="flat" cmpd="sng" w="9525">
+            <a:solidFill>
+              <a:schemeClr val="dk2"/>
+            </a:solidFill>
+            <a:prstDash val="solid"/>
+            <a:round/>
+            <a:headEnd len="med" w="med" type="none"/>
+            <a:tailEnd len="med" w="med" type="triangle"/>
+          </a:ln>
+        </p:spPr>
+      </p:cxnSp>
+      <p:cxnSp>
+        <p:nvCxnSpPr>
+          <p:cNvPr id="480" name="Google Shape;480;p18"/>
+          <p:cNvCxnSpPr>
+            <a:stCxn id="476" idx="2"/>
+            <a:endCxn id="477" idx="0"/>
+          </p:cNvCxnSpPr>
+          <p:nvPr/>
+        </p:nvCxnSpPr>
+        <p:spPr>
+          <a:xfrm>
+            <a:off x="1300075" y="5065000"/>
+            <a:ext cx="0" cy="225900"/>
+          </a:xfrm>
+          <a:prstGeom prst="straightConnector1">
+            <a:avLst/>
+          </a:prstGeom>
+          <a:noFill/>
+          <a:ln cap="flat" cmpd="sng" w="9525">
+            <a:solidFill>
+              <a:schemeClr val="dk2"/>
+            </a:solidFill>
+            <a:prstDash val="solid"/>
+            <a:round/>
+            <a:headEnd len="med" w="med" type="none"/>
+            <a:tailEnd len="med" w="med" type="triangle"/>
+          </a:ln>
+        </p:spPr>
+      </p:cxnSp>
+      <p:cxnSp>
+        <p:nvCxnSpPr>
+          <p:cNvPr id="481" name="Google Shape;481;p18"/>
+          <p:cNvCxnSpPr>
+            <a:stCxn id="477" idx="1"/>
+            <a:endCxn id="448" idx="1"/>
+          </p:cNvCxnSpPr>
+          <p:nvPr/>
+        </p:nvCxnSpPr>
+        <p:spPr>
+          <a:xfrm flipH="1" rot="10800000">
+            <a:off x="403100" y="1564200"/>
+            <a:ext cx="1234500" cy="4038900"/>
+          </a:xfrm>
+          <a:prstGeom prst="bentConnector3">
+            <a:avLst>
+              <a:gd fmla="val -19289" name="adj1"/>
+            </a:avLst>
+          </a:prstGeom>
+          <a:noFill/>
+          <a:ln cap="flat" cmpd="sng" w="9525">
+            <a:solidFill>
+              <a:schemeClr val="dk2"/>
+            </a:solidFill>
+            <a:prstDash val="solid"/>
+            <a:round/>
+            <a:headEnd len="med" w="med" type="none"/>
+            <a:tailEnd len="med" w="med" type="stealth"/>
+          </a:ln>
+        </p:spPr>
+      </p:cxnSp>
+      <p:sp>
+        <p:nvSpPr>
+          <p:cNvPr id="482" name="Google Shape;482;p18"/>
+          <p:cNvSpPr/>
+          <p:nvPr/>
+        </p:nvSpPr>
+        <p:spPr>
+          <a:xfrm>
+            <a:off x="5991882" y="504275"/>
+            <a:ext cx="1079000" cy="5300375"/>
+          </a:xfrm>
+          <a:custGeom>
+            <a:rect b="b" l="l" r="r" t="t"/>
+            <a:pathLst>
+              <a:path extrusionOk="0" h="212015" w="43160">
+                <a:moveTo>
+                  <a:pt x="36438" y="0"/>
+                </a:moveTo>
+                <a:cubicBezTo>
+                  <a:pt x="30387" y="8143"/>
+                  <a:pt x="1177" y="30480"/>
+                  <a:pt x="131" y="48857"/>
+                </a:cubicBezTo>
+                <a:cubicBezTo>
+                  <a:pt x="-915" y="67235"/>
+                  <a:pt x="29267" y="98984"/>
+                  <a:pt x="30163" y="110265"/>
+                </a:cubicBezTo>
+                <a:cubicBezTo>
+                  <a:pt x="31060" y="121546"/>
+                  <a:pt x="5734" y="113926"/>
+                  <a:pt x="5510" y="116541"/>
+                </a:cubicBezTo>
+                <a:cubicBezTo>
+                  <a:pt x="5286" y="119156"/>
+                  <a:pt x="28519" y="117662"/>
+                  <a:pt x="28818" y="125954"/>
+                </a:cubicBezTo>
+                <a:cubicBezTo>
+                  <a:pt x="29117" y="134246"/>
+                  <a:pt x="4913" y="151952"/>
+                  <a:pt x="7303" y="166295"/>
+                </a:cubicBezTo>
+                <a:cubicBezTo>
+                  <a:pt x="9694" y="180639"/>
+                  <a:pt x="37185" y="204395"/>
+                  <a:pt x="43161" y="212015"/>
+                </a:cubicBezTo>
+              </a:path>
+            </a:pathLst>
+          </a:custGeom>
+          <a:noFill/>
+          <a:ln cap="flat" cmpd="sng" w="28575">
+            <a:solidFill>
+              <a:srgbClr val="999999"/>
+            </a:solidFill>
+            <a:prstDash val="solid"/>
+            <a:round/>
+            <a:headEnd len="med" w="med" type="none"/>
+            <a:tailEnd len="med" w="med" type="none"/>
+          </a:ln>
+        </p:spPr>
+      </p:sp>
+      <p:cxnSp>
+        <p:nvCxnSpPr>
+          <p:cNvPr id="483" name="Google Shape;483;p18"/>
+          <p:cNvCxnSpPr>
+            <a:stCxn id="455" idx="3"/>
+          </p:cNvCxnSpPr>
+          <p:nvPr/>
+        </p:nvCxnSpPr>
+        <p:spPr>
+          <a:xfrm flipH="1" rot="10800000">
+            <a:off x="4716375" y="3428900"/>
+            <a:ext cx="1390800" cy="1202700"/>
+          </a:xfrm>
+          <a:prstGeom prst="straightConnector1">
+            <a:avLst/>
+          </a:prstGeom>
+          <a:noFill/>
+          <a:ln cap="flat" cmpd="sng" w="28575">
+            <a:solidFill>
+              <a:srgbClr val="999999"/>
+            </a:solidFill>
+            <a:prstDash val="solid"/>
+            <a:round/>
+            <a:headEnd len="med" w="med" type="none"/>
+            <a:tailEnd len="med" w="med" type="triangle"/>
+          </a:ln>
+        </p:spPr>
+      </p:cxnSp>
+    </p:spTree>
+  </p:cSld>
+  <p:clrMapOvr>
+    <a:masterClrMapping/>
+  </p:clrMapOvr>
+  <mc:AlternateContent>
+    <mc:Choice Requires="p14">
+      <p:transition spd="slow" p14:dur="700">
+        <p:fade/>
+      </p:transition>
+    </mc:Choice>
+    <mc:Fallback>
+      <p:transition spd="slow">
+        <p:fade/>
+      </p:transition>
+    </mc:Fallback>
+  </mc:AlternateContent>
+</p:sld>
+</file>
+
+<file path=ppt/slides/slide7.xml><?xml version="1.0" encoding="utf-8"?>
+<p:sld xmlns:a="http://schemas.openxmlformats.org/drawingml/2006/main" xmlns:r="http://schemas.openxmlformats.org/officeDocument/2006/relationships" xmlns:mc="http://schemas.openxmlformats.org/markup-compatibility/2006" xmlns:mv="urn:schemas-microsoft-com:mac:vml" xmlns:p="http://schemas.openxmlformats.org/presentationml/2006/main" xmlns:c="http://schemas.openxmlformats.org/drawingml/2006/chart" xmlns:dgm="http://schemas.openxmlformats.org/drawingml/2006/diagram" xmlns:o="urn:schemas-microsoft-com:office:office" xmlns:v="urn:schemas-microsoft-com:vml" xmlns:pvml="urn:schemas-microsoft-com:office:powerpoint" xmlns:com="http://schemas.openxmlformats.org/drawingml/2006/compatibility" xmlns:p14="http://schemas.microsoft.com/office/powerpoint/2010/main" xmlns:p15="http://schemas.microsoft.com/office/powerpoint/2012/main" xmlns:ahyp="http://schemas.microsoft.com/office/drawing/2018/hyperlinkcolor">
+  <p:cSld>
+    <p:spTree>
+      <p:nvGrpSpPr>
+        <p:cNvPr id="487" name="Shape 487"/>
+        <p:cNvGrpSpPr/>
+        <p:nvPr/>
+      </p:nvGrpSpPr>
+      <p:grpSpPr>
+        <a:xfrm>
+          <a:off x="0" y="0"/>
+          <a:ext cx="0" cy="0"/>
+          <a:chOff x="0" y="0"/>
+          <a:chExt cx="0" cy="0"/>
+        </a:xfrm>
+      </p:grpSpPr>
+      <p:sp>
+        <p:nvSpPr>
+          <p:cNvPr id="488" name="Google Shape;488;p19"/>
+          <p:cNvSpPr txBox="1"/>
+          <p:nvPr>
+            <p:ph type="title"/>
+          </p:nvPr>
+        </p:nvSpPr>
+        <p:spPr>
+          <a:xfrm>
+            <a:off x="115875" y="0"/>
+            <a:ext cx="10972800" cy="914400"/>
+          </a:xfrm>
+          <a:prstGeom prst="rect">
+            <a:avLst/>
+          </a:prstGeom>
+          <a:noFill/>
+          <a:ln>
+            <a:noFill/>
+          </a:ln>
+        </p:spPr>
+        <p:txBody>
+          <a:bodyPr anchorCtr="0" anchor="b" bIns="45700" lIns="91425" spcFirstLastPara="1" rIns="91425" wrap="square" tIns="45700">
+            <a:normAutofit/>
+          </a:bodyPr>
+          <a:lstStyle/>
+          <a:p>
+            <a:pPr indent="0" lvl="0" marL="0" rtl="0" algn="l">
+              <a:lnSpc>
+                <a:spcPct val="90000"/>
+              </a:lnSpc>
+              <a:spcBef>
+                <a:spcPts val="0"/>
+              </a:spcBef>
+              <a:spcAft>
+                <a:spcPts val="0"/>
+              </a:spcAft>
+              <a:buClr>
+                <a:srgbClr val="276E8B"/>
+              </a:buClr>
+              <a:buSzPts val="3200"/>
+              <a:buFont typeface="Arial"/>
+              <a:buNone/>
+            </a:pPr>
+            <a:r>
+              <a:rPr lang="en-US"/>
+              <a:t>Software Framework - Classes</a:t>
+            </a:r>
+            <a:endParaRPr/>
+          </a:p>
+        </p:txBody>
+      </p:sp>
+      <p:sp>
+        <p:nvSpPr>
+          <p:cNvPr id="489" name="Google Shape;489;p19"/>
+          <p:cNvSpPr txBox="1"/>
+          <p:nvPr>
+            <p:ph idx="1" type="body"/>
+          </p:nvPr>
+        </p:nvSpPr>
+        <p:spPr>
+          <a:xfrm>
+            <a:off x="318675" y="1233050"/>
+            <a:ext cx="10972800" cy="4724400"/>
+          </a:xfrm>
+          <a:prstGeom prst="rect">
+            <a:avLst/>
+          </a:prstGeom>
+          <a:noFill/>
+          <a:ln>
+            <a:noFill/>
+          </a:ln>
+        </p:spPr>
+        <p:txBody>
+          <a:bodyPr anchorCtr="0" anchor="t" bIns="45700" lIns="91425" spcFirstLastPara="1" rIns="91425" wrap="square" tIns="45700">
+            <a:normAutofit/>
+          </a:bodyPr>
+          <a:lstStyle/>
+          <a:p>
+            <a:pPr indent="0" lvl="0" marL="0" rtl="0" algn="l">
+              <a:lnSpc>
+                <a:spcPct val="115000"/>
+              </a:lnSpc>
+              <a:spcBef>
+                <a:spcPts val="1000"/>
+              </a:spcBef>
+              <a:spcAft>
+                <a:spcPts val="0"/>
+              </a:spcAft>
+              <a:buNone/>
+            </a:pPr>
+            <a:r>
+              <a:rPr lang="en-US" u="sng"/>
+              <a:t>Hardware</a:t>
+            </a:r>
+            <a:endParaRPr/>
+          </a:p>
+          <a:p>
+            <a:pPr indent="-342900" lvl="0" marL="457200" rtl="0" algn="l">
+              <a:lnSpc>
+                <a:spcPct val="115000"/>
+              </a:lnSpc>
+              <a:spcBef>
+                <a:spcPts val="1000"/>
+              </a:spcBef>
+              <a:spcAft>
+                <a:spcPts val="0"/>
+              </a:spcAft>
+              <a:buSzPts val="1800"/>
+              <a:buChar char="-"/>
+            </a:pPr>
+            <a:r>
+              <a:rPr lang="en-US"/>
+              <a:t>Button (gathers data about button press)</a:t>
+            </a:r>
+            <a:endParaRPr/>
+          </a:p>
+          <a:p>
+            <a:pPr indent="-342900" lvl="0" marL="457200" rtl="0" algn="l">
+              <a:lnSpc>
+                <a:spcPct val="115000"/>
+              </a:lnSpc>
+              <a:spcBef>
+                <a:spcPts val="0"/>
+              </a:spcBef>
+              <a:spcAft>
+                <a:spcPts val="0"/>
+              </a:spcAft>
+              <a:buSzPts val="1800"/>
+              <a:buChar char="-"/>
+            </a:pPr>
+            <a:r>
+              <a:rPr lang="en-US"/>
+              <a:t>MorseKey (translates button press to dot/dash)</a:t>
+            </a:r>
+            <a:endParaRPr/>
+          </a:p>
+          <a:p>
+            <a:pPr indent="-342900" lvl="0" marL="457200" rtl="0" algn="l">
+              <a:lnSpc>
+                <a:spcPct val="115000"/>
+              </a:lnSpc>
+              <a:spcBef>
+                <a:spcPts val="0"/>
+              </a:spcBef>
+              <a:spcAft>
+                <a:spcPts val="0"/>
+              </a:spcAft>
+              <a:buSzPts val="1800"/>
+              <a:buChar char="-"/>
+            </a:pPr>
+            <a:r>
+              <a:rPr lang="en-US"/>
+              <a:t>Display (controls the display)</a:t>
+            </a:r>
+            <a:endParaRPr/>
+          </a:p>
+          <a:p>
+            <a:pPr indent="-342900" lvl="0" marL="457200" rtl="0" algn="l">
+              <a:lnSpc>
+                <a:spcPct val="115000"/>
+              </a:lnSpc>
+              <a:spcBef>
+                <a:spcPts val="0"/>
+              </a:spcBef>
+              <a:spcAft>
+                <a:spcPts val="0"/>
+              </a:spcAft>
+              <a:buSzPts val="1800"/>
+              <a:buChar char="-"/>
+            </a:pPr>
+            <a:r>
+              <a:rPr lang="en-US"/>
+              <a:t>Indicator (controls Morse output on LED and buzzer)</a:t>
+            </a:r>
+            <a:endParaRPr/>
+          </a:p>
+          <a:p>
+            <a:pPr indent="0" lvl="0" marL="0" rtl="0" algn="l">
+              <a:lnSpc>
+                <a:spcPct val="115000"/>
+              </a:lnSpc>
+              <a:spcBef>
+                <a:spcPts val="1000"/>
+              </a:spcBef>
+              <a:spcAft>
+                <a:spcPts val="0"/>
+              </a:spcAft>
+              <a:buNone/>
+            </a:pPr>
+            <a:r>
+              <a:rPr lang="en-US" u="sng"/>
+              <a:t>Logic</a:t>
+            </a:r>
+            <a:endParaRPr u="sng"/>
+          </a:p>
+          <a:p>
+            <a:pPr indent="-342900" lvl="0" marL="457200" rtl="0" algn="l">
+              <a:lnSpc>
+                <a:spcPct val="115000"/>
+              </a:lnSpc>
+              <a:spcBef>
+                <a:spcPts val="1000"/>
+              </a:spcBef>
+              <a:spcAft>
+                <a:spcPts val="0"/>
+              </a:spcAft>
+              <a:buSzPts val="1800"/>
+              <a:buChar char="-"/>
+            </a:pPr>
+            <a:r>
+              <a:rPr lang="en-US"/>
+              <a:t>MorseCode (translates between dot/dash and letter, both ways)</a:t>
+            </a:r>
+            <a:endParaRPr/>
+          </a:p>
+          <a:p>
+            <a:pPr indent="-342900" lvl="0" marL="457200" rtl="0" algn="l">
+              <a:lnSpc>
+                <a:spcPct val="115000"/>
+              </a:lnSpc>
+              <a:spcBef>
+                <a:spcPts val="0"/>
+              </a:spcBef>
+              <a:spcAft>
+                <a:spcPts val="0"/>
+              </a:spcAft>
+              <a:buSzPts val="1800"/>
+              <a:buChar char="-"/>
+            </a:pPr>
+            <a:r>
+              <a:rPr lang="en-US"/>
+              <a:t>TrainingMode (controls steps in </a:t>
+            </a:r>
+            <a:r>
+              <a:rPr lang="en-US"/>
+              <a:t>training</a:t>
+            </a:r>
+            <a:r>
+              <a:rPr lang="en-US"/>
+              <a:t> mode)</a:t>
+            </a:r>
+            <a:endParaRPr/>
+          </a:p>
+          <a:p>
+            <a:pPr indent="-342900" lvl="0" marL="457200" rtl="0" algn="l">
+              <a:lnSpc>
+                <a:spcPct val="115000"/>
+              </a:lnSpc>
+              <a:spcBef>
+                <a:spcPts val="0"/>
+              </a:spcBef>
+              <a:spcAft>
+                <a:spcPts val="0"/>
+              </a:spcAft>
+              <a:buSzPts val="1800"/>
+              <a:buChar char="-"/>
+            </a:pPr>
+            <a:r>
+              <a:rPr lang="en-US"/>
+              <a:t>TypingMode (controls steps in </a:t>
+            </a:r>
+            <a:r>
+              <a:rPr lang="en-US"/>
+              <a:t>typing</a:t>
+            </a:r>
+            <a:r>
+              <a:rPr lang="en-US"/>
+              <a:t> mode)</a:t>
+            </a:r>
+            <a:endParaRPr/>
+          </a:p>
+          <a:p>
+            <a:pPr indent="-342900" lvl="0" marL="457200" rtl="0" algn="l">
+              <a:lnSpc>
+                <a:spcPct val="115000"/>
+              </a:lnSpc>
+              <a:spcBef>
+                <a:spcPts val="0"/>
+              </a:spcBef>
+              <a:spcAft>
+                <a:spcPts val="0"/>
+              </a:spcAft>
+              <a:buSzPts val="1800"/>
+              <a:buChar char="-"/>
+            </a:pPr>
+            <a:r>
+              <a:rPr lang="en-US"/>
+              <a:t>MorseTrainer (controls start screen, triggers TrainingMode and TypingMode)</a:t>
+            </a:r>
+            <a:endParaRPr/>
+          </a:p>
+        </p:txBody>
+      </p:sp>
+    </p:spTree>
+  </p:cSld>
+  <p:clrMapOvr>
+    <a:masterClrMapping/>
+  </p:clrMapOvr>
+  <mc:AlternateContent>
+    <mc:Choice Requires="p14">
+      <p:transition spd="slow" p14:dur="700">
+        <p:fade/>
+      </p:transition>
+    </mc:Choice>
+    <mc:Fallback>
+      <p:transition spd="slow">
+        <p:fade/>
+      </p:transition>
+    </mc:Fallback>
+  </mc:AlternateContent>
+</p:sld>
+</file>
+
+<file path=ppt/slides/slide8.xml><?xml version="1.0" encoding="utf-8"?>
+<p:sld xmlns:a="http://schemas.openxmlformats.org/drawingml/2006/main" xmlns:r="http://schemas.openxmlformats.org/officeDocument/2006/relationships" xmlns:mc="http://schemas.openxmlformats.org/markup-compatibility/2006" xmlns:mv="urn:schemas-microsoft-com:mac:vml" xmlns:p="http://schemas.openxmlformats.org/presentationml/2006/main" xmlns:c="http://schemas.openxmlformats.org/drawingml/2006/chart" xmlns:dgm="http://schemas.openxmlformats.org/drawingml/2006/diagram" xmlns:o="urn:schemas-microsoft-com:office:office" xmlns:v="urn:schemas-microsoft-com:vml" xmlns:pvml="urn:schemas-microsoft-com:office:powerpoint" xmlns:com="http://schemas.openxmlformats.org/drawingml/2006/compatibility" xmlns:p14="http://schemas.microsoft.com/office/powerpoint/2010/main" xmlns:p15="http://schemas.microsoft.com/office/powerpoint/2012/main" xmlns:ahyp="http://schemas.microsoft.com/office/drawing/2018/hyperlinkcolor">
+  <p:cSld>
+    <p:spTree>
+      <p:nvGrpSpPr>
+        <p:cNvPr id="493" name="Shape 493"/>
+        <p:cNvGrpSpPr/>
+        <p:nvPr/>
+      </p:nvGrpSpPr>
+      <p:grpSpPr>
+        <a:xfrm>
+          <a:off x="0" y="0"/>
+          <a:ext cx="0" cy="0"/>
+          <a:chOff x="0" y="0"/>
+          <a:chExt cx="0" cy="0"/>
+        </a:xfrm>
+      </p:grpSpPr>
+      <p:sp>
+        <p:nvSpPr>
+          <p:cNvPr id="494" name="Google Shape;494;p20"/>
+          <p:cNvSpPr txBox="1"/>
+          <p:nvPr>
+            <p:ph type="title"/>
+          </p:nvPr>
+        </p:nvSpPr>
+        <p:spPr>
+          <a:xfrm>
+            <a:off x="115875" y="0"/>
+            <a:ext cx="10972800" cy="914400"/>
+          </a:xfrm>
+          <a:prstGeom prst="rect">
+            <a:avLst/>
+          </a:prstGeom>
+          <a:noFill/>
+          <a:ln>
+            <a:noFill/>
+          </a:ln>
+        </p:spPr>
+        <p:txBody>
+          <a:bodyPr anchorCtr="0" anchor="b" bIns="45700" lIns="91425" spcFirstLastPara="1" rIns="91425" wrap="square" tIns="45700">
+            <a:normAutofit/>
+          </a:bodyPr>
+          <a:lstStyle/>
+          <a:p>
+            <a:pPr indent="0" lvl="0" marL="0" rtl="0" algn="l">
+              <a:lnSpc>
+                <a:spcPct val="90000"/>
+              </a:lnSpc>
+              <a:spcBef>
+                <a:spcPts val="0"/>
+              </a:spcBef>
+              <a:spcAft>
+                <a:spcPts val="0"/>
+              </a:spcAft>
+              <a:buClr>
+                <a:srgbClr val="276E8B"/>
+              </a:buClr>
+              <a:buSzPts val="3200"/>
+              <a:buFont typeface="Arial"/>
+              <a:buNone/>
+            </a:pPr>
+            <a:r>
+              <a:rPr lang="en-US"/>
+              <a:t>Software Framework - Workflow</a:t>
+            </a:r>
+            <a:endParaRPr/>
+          </a:p>
+        </p:txBody>
+      </p:sp>
+      <p:sp>
+        <p:nvSpPr>
+          <p:cNvPr id="495" name="Google Shape;495;p20"/>
+          <p:cNvSpPr txBox="1"/>
+          <p:nvPr>
+            <p:ph idx="1" type="body"/>
+          </p:nvPr>
+        </p:nvSpPr>
+        <p:spPr>
+          <a:xfrm>
+            <a:off x="318675" y="1233050"/>
+            <a:ext cx="10972800" cy="4724400"/>
+          </a:xfrm>
+          <a:prstGeom prst="rect">
+            <a:avLst/>
+          </a:prstGeom>
+          <a:noFill/>
+          <a:ln>
+            <a:noFill/>
+          </a:ln>
+        </p:spPr>
+        <p:txBody>
+          <a:bodyPr anchorCtr="0" anchor="t" bIns="45700" lIns="91425" spcFirstLastPara="1" rIns="91425" wrap="square" tIns="45700">
+            <a:normAutofit/>
+          </a:bodyPr>
+          <a:lstStyle/>
+          <a:p>
+            <a:pPr indent="0" lvl="0" marL="0" rtl="0" algn="l">
+              <a:lnSpc>
+                <a:spcPct val="115000"/>
+              </a:lnSpc>
+              <a:spcBef>
+                <a:spcPts val="1000"/>
+              </a:spcBef>
+              <a:spcAft>
+                <a:spcPts val="0"/>
+              </a:spcAft>
+              <a:buNone/>
+            </a:pPr>
+            <a:r>
+              <a:rPr lang="en-US"/>
+              <a:t>MorseTrainer → Display</a:t>
+            </a:r>
+            <a:endParaRPr/>
+          </a:p>
+          <a:p>
+            <a:pPr indent="0" lvl="0" marL="0" rtl="0" algn="l">
+              <a:lnSpc>
+                <a:spcPct val="115000"/>
+              </a:lnSpc>
+              <a:spcBef>
+                <a:spcPts val="1000"/>
+              </a:spcBef>
+              <a:spcAft>
+                <a:spcPts val="0"/>
+              </a:spcAft>
+              <a:buNone/>
+            </a:pPr>
+            <a:r>
+              <a:rPr lang="en-US"/>
+              <a:t>MorseTrainer → TrainingMode </a:t>
+            </a:r>
+            <a:endParaRPr/>
+          </a:p>
+          <a:p>
+            <a:pPr indent="0" lvl="0" marL="0" rtl="0" algn="l">
+              <a:lnSpc>
+                <a:spcPct val="115000"/>
+              </a:lnSpc>
+              <a:spcBef>
+                <a:spcPts val="1000"/>
+              </a:spcBef>
+              <a:spcAft>
+                <a:spcPts val="0"/>
+              </a:spcAft>
+              <a:buNone/>
+            </a:pPr>
+            <a:r>
+              <a:rPr lang="en-US"/>
+              <a:t>	</a:t>
+            </a:r>
+            <a:r>
+              <a:rPr lang="en-US"/>
+              <a:t>TrainingMode </a:t>
+            </a:r>
+            <a:r>
+              <a:rPr lang="en-US"/>
+              <a:t>→ Display (displays letter)</a:t>
+            </a:r>
+            <a:endParaRPr/>
+          </a:p>
+          <a:p>
+            <a:pPr indent="0" lvl="0" marL="0" rtl="0" algn="l">
+              <a:lnSpc>
+                <a:spcPct val="115000"/>
+              </a:lnSpc>
+              <a:spcBef>
+                <a:spcPts val="1000"/>
+              </a:spcBef>
+              <a:spcAft>
+                <a:spcPts val="0"/>
+              </a:spcAft>
+              <a:buNone/>
+            </a:pPr>
+            <a:r>
+              <a:rPr lang="en-US"/>
+              <a:t>	</a:t>
+            </a:r>
+            <a:r>
+              <a:rPr lang="en-US"/>
+              <a:t>TrainingMode </a:t>
+            </a:r>
+            <a:r>
+              <a:rPr lang="en-US"/>
+              <a:t>→ Indicator (displays MorseCode of letter)</a:t>
+            </a:r>
+            <a:endParaRPr/>
+          </a:p>
+          <a:p>
+            <a:pPr indent="0" lvl="0" marL="0" rtl="0" algn="l">
+              <a:lnSpc>
+                <a:spcPct val="115000"/>
+              </a:lnSpc>
+              <a:spcBef>
+                <a:spcPts val="1000"/>
+              </a:spcBef>
+              <a:spcAft>
+                <a:spcPts val="0"/>
+              </a:spcAft>
+              <a:buNone/>
+            </a:pPr>
+            <a:r>
+              <a:rPr lang="en-US"/>
+              <a:t>	</a:t>
+            </a:r>
+            <a:r>
+              <a:rPr lang="en-US"/>
+              <a:t>TrainingMode </a:t>
+            </a:r>
+            <a:r>
+              <a:rPr lang="en-US"/>
+              <a:t>→ MorseKey (converts input to dot/dash)</a:t>
+            </a:r>
+            <a:endParaRPr/>
+          </a:p>
+          <a:p>
+            <a:pPr indent="0" lvl="0" marL="0" rtl="0" algn="l">
+              <a:lnSpc>
+                <a:spcPct val="115000"/>
+              </a:lnSpc>
+              <a:spcBef>
+                <a:spcPts val="1000"/>
+              </a:spcBef>
+              <a:spcAft>
+                <a:spcPts val="0"/>
+              </a:spcAft>
+              <a:buNone/>
+            </a:pPr>
+            <a:r>
+              <a:rPr lang="en-US"/>
+              <a:t>	</a:t>
+            </a:r>
+            <a:r>
+              <a:rPr lang="en-US"/>
+              <a:t>TrainingMode </a:t>
+            </a:r>
+            <a:r>
+              <a:rPr lang="en-US"/>
+              <a:t>→ MorseCode (converts dot/dash to letter)</a:t>
+            </a:r>
+            <a:endParaRPr/>
+          </a:p>
+          <a:p>
+            <a:pPr indent="0" lvl="0" marL="0" rtl="0" algn="l">
+              <a:lnSpc>
+                <a:spcPct val="115000"/>
+              </a:lnSpc>
+              <a:spcBef>
+                <a:spcPts val="1000"/>
+              </a:spcBef>
+              <a:spcAft>
+                <a:spcPts val="0"/>
+              </a:spcAft>
+              <a:buNone/>
+            </a:pPr>
+            <a:r>
+              <a:t/>
+            </a:r>
+            <a:endParaRPr/>
+          </a:p>
+          <a:p>
+            <a:pPr indent="0" lvl="0" marL="0" rtl="0" algn="l">
+              <a:lnSpc>
+                <a:spcPct val="115000"/>
+              </a:lnSpc>
+              <a:spcBef>
+                <a:spcPts val="1000"/>
+              </a:spcBef>
+              <a:spcAft>
+                <a:spcPts val="0"/>
+              </a:spcAft>
+              <a:buNone/>
+            </a:pPr>
+            <a:r>
+              <a:rPr lang="en-US"/>
+              <a:t>TypingMode would use the same classes, converting button input→dot/dash→letter→display. Indicators will be directly tied to button input, flashing/buzzing whenever the button is pressed. </a:t>
+            </a:r>
+            <a:endParaRPr/>
+          </a:p>
+        </p:txBody>
+      </p:sp>
+    </p:spTree>
+  </p:cSld>
+  <p:clrMapOvr>
+    <a:masterClrMapping/>
+  </p:clrMapOvr>
+  <mc:AlternateContent>
+    <mc:Choice Requires="p14">
+      <p:transition spd="slow" p14:dur="700">
+        <p:fade/>
+      </p:transition>
+    </mc:Choice>
+    <mc:Fallback>
+      <p:transition spd="slow">
+        <p:fade/>
+      </p:transition>
+    </mc:Fallback>
+  </mc:AlternateContent>
+</p:sld>
+</file>
+
+<file path=ppt/slides/slide9.xml><?xml version="1.0" encoding="utf-8"?>
+<p:sld xmlns:a="http://schemas.openxmlformats.org/drawingml/2006/main" xmlns:r="http://schemas.openxmlformats.org/officeDocument/2006/relationships" xmlns:mc="http://schemas.openxmlformats.org/markup-compatibility/2006" xmlns:mv="urn:schemas-microsoft-com:mac:vml" xmlns:p="http://schemas.openxmlformats.org/presentationml/2006/main" xmlns:c="http://schemas.openxmlformats.org/drawingml/2006/chart" xmlns:dgm="http://schemas.openxmlformats.org/drawingml/2006/diagram" xmlns:o="urn:schemas-microsoft-com:office:office" xmlns:v="urn:schemas-microsoft-com:vml" xmlns:pvml="urn:schemas-microsoft-com:office:powerpoint" xmlns:com="http://schemas.openxmlformats.org/drawingml/2006/compatibility" xmlns:p14="http://schemas.microsoft.com/office/powerpoint/2010/main" xmlns:p15="http://schemas.microsoft.com/office/powerpoint/2012/main" xmlns:ahyp="http://schemas.microsoft.com/office/drawing/2018/hyperlinkcolor">
+  <p:cSld>
+    <p:spTree>
+      <p:nvGrpSpPr>
+        <p:cNvPr id="499" name="Shape 499"/>
+        <p:cNvGrpSpPr/>
+        <p:nvPr/>
+      </p:nvGrpSpPr>
+      <p:grpSpPr>
+        <a:xfrm>
+          <a:off x="0" y="0"/>
+          <a:ext cx="0" cy="0"/>
+          <a:chOff x="0" y="0"/>
+          <a:chExt cx="0" cy="0"/>
+        </a:xfrm>
+      </p:grpSpPr>
+      <p:sp>
+        <p:nvSpPr>
+          <p:cNvPr id="500" name="Google Shape;500;p21"/>
+          <p:cNvSpPr txBox="1"/>
+          <p:nvPr>
+            <p:ph type="title"/>
+          </p:nvPr>
+        </p:nvSpPr>
+        <p:spPr>
+          <a:xfrm>
             <a:off x="609600" y="228600"/>
             <a:ext cx="10972800" cy="914401"/>
           </a:xfrm>
@@ -21465,7 +23959,7 @@
       </p:sp>
       <p:graphicFrame>
         <p:nvGraphicFramePr>
-          <p:cNvPr id="448" name="Google Shape;448;p18"/>
+          <p:cNvPr id="501" name="Google Shape;501;p21"/>
           <p:cNvGraphicFramePr/>
           <p:nvPr/>
         </p:nvGraphicFramePr>
@@ -21478,7 +23972,7 @@
             <a:tbl>
               <a:tblPr bandRow="1" firstRow="1">
                 <a:noFill/>
-                <a:tableStyleId>{E0F1AD35-00AB-439C-BF76-2F3B06186C07}</a:tableStyleId>
+                <a:tableStyleId>{5A6D38CD-A279-4388-BD30-0721C9A04DA6}</a:tableStyleId>
               </a:tblPr>
               <a:tblGrid>
                 <a:gridCol w="7837725"/>
@@ -22076,7 +24570,7 @@
       </p:graphicFrame>
       <p:sp>
         <p:nvSpPr>
-          <p:cNvPr id="449" name="Google Shape;449;p18"/>
+          <p:cNvPr id="502" name="Google Shape;502;p21"/>
           <p:cNvSpPr txBox="1"/>
           <p:nvPr/>
         </p:nvSpPr>
